--- a/deliverables/fieldwork-launch-kit/04-corporate-sales/fieldwork-sales-deck.pptx
+++ b/deliverables/fieldwork-launch-kit/04-corporate-sales/fieldwork-sales-deck.pptx
@@ -2096,7 +2096,7 @@
               <a:buNone/>
             </a:pPr>
             <a:r>
-              <a:rPr lang="en-US" sz="5400" b="1" dirty="0">
+              <a:rPr lang="en-US" sz="8000" b="1" dirty="0">
                 <a:solidFill>
                   <a:srgbClr val="F1EFEA"/>
                 </a:solidFill>
@@ -2106,7 +2106,7 @@
               </a:rPr>
               <a:t>Practise AI on real work.</a:t>
             </a:r>
-            <a:endParaRPr lang="en-US" sz="5400" dirty="0"/>
+            <a:endParaRPr lang="en-US" sz="8000" dirty="0"/>
           </a:p>
         </p:txBody>
       </p:sp>
@@ -2118,7 +2118,7 @@
         </p:nvSpPr>
         <p:spPr>
           <a:xfrm>
-            <a:off x="548640" y="3474720"/>
+            <a:off x="548640" y="3840480"/>
             <a:ext cx="10058400" cy="548640"/>
           </a:xfrm>
           <a:prstGeom prst="rect">
@@ -2323,7 +2323,7 @@
               <a:buNone/>
             </a:pPr>
             <a:r>
-              <a:rPr lang="en-US" sz="3600" b="1" dirty="0">
+              <a:rPr lang="en-US" sz="4400" b="1" dirty="0">
                 <a:solidFill>
                   <a:srgbClr val="262422"/>
                 </a:solidFill>
@@ -2333,7 +2333,7 @@
               </a:rPr>
               <a:t>Small, measured, easy to stop.</a:t>
             </a:r>
-            <a:endParaRPr lang="en-US" sz="3600" dirty="0"/>
+            <a:endParaRPr lang="en-US" sz="4400" dirty="0"/>
           </a:p>
         </p:txBody>
       </p:sp>
@@ -2345,7 +2345,7 @@
         </p:nvSpPr>
         <p:spPr>
           <a:xfrm>
-            <a:off x="548640" y="2377440"/>
+            <a:off x="548640" y="2468880"/>
             <a:ext cx="10515600" cy="3383280"/>
           </a:xfrm>
           <a:prstGeom prst="rect">
@@ -2360,13 +2360,13 @@
           <a:p>
             <a:pPr marL="342900" indent="-342900">
               <a:spcAft>
-                <a:spcPts val="800"/>
+                <a:spcPts val="1200"/>
               </a:spcAft>
               <a:buSzPct val="100000"/>
               <a:buChar char="●"/>
             </a:pPr>
             <a:r>
-              <a:rPr lang="en-US" sz="1800" dirty="0">
+              <a:rPr lang="en-US" sz="2400" dirty="0">
                 <a:solidFill>
                   <a:srgbClr val="262422"/>
                 </a:solidFill>
@@ -2376,18 +2376,18 @@
               </a:rPr>
               <a:t>Week 0: Conversation. Agree workflows, people, measures.</a:t>
             </a:r>
-            <a:endParaRPr lang="en-US" sz="1800" dirty="0"/>
+            <a:endParaRPr lang="en-US" sz="2400" dirty="0"/>
           </a:p>
           <a:p>
             <a:pPr marL="342900" indent="-342900">
               <a:spcAft>
-                <a:spcPts val="800"/>
+                <a:spcPts val="1200"/>
               </a:spcAft>
               <a:buSzPct val="100000"/>
               <a:buChar char="●"/>
             </a:pPr>
             <a:r>
-              <a:rPr lang="en-US" sz="1800" dirty="0">
+              <a:rPr lang="en-US" sz="2400" dirty="0">
                 <a:solidFill>
                   <a:srgbClr val="262422"/>
                 </a:solidFill>
@@ -2397,18 +2397,18 @@
               </a:rPr>
               <a:t>Week 1: Write the AI-use rule and house briefs.</a:t>
             </a:r>
-            <a:endParaRPr lang="en-US" sz="1800" dirty="0"/>
+            <a:endParaRPr lang="en-US" sz="2400" dirty="0"/>
           </a:p>
           <a:p>
             <a:pPr marL="342900" indent="-342900">
               <a:spcAft>
-                <a:spcPts val="800"/>
+                <a:spcPts val="1200"/>
               </a:spcAft>
               <a:buSzPct val="100000"/>
               <a:buChar char="●"/>
             </a:pPr>
             <a:r>
-              <a:rPr lang="en-US" sz="1800" dirty="0">
+              <a:rPr lang="en-US" sz="2400" dirty="0">
                 <a:solidFill>
                   <a:srgbClr val="262422"/>
                 </a:solidFill>
@@ -2418,18 +2418,18 @@
               </a:rPr>
               <a:t>Weeks 2 to 3: Practise on anonymised real examples. A person checks each output.</a:t>
             </a:r>
-            <a:endParaRPr lang="en-US" sz="1800" dirty="0"/>
+            <a:endParaRPr lang="en-US" sz="2400" dirty="0"/>
           </a:p>
           <a:p>
             <a:pPr marL="342900" indent="-342900">
               <a:spcAft>
-                <a:spcPts val="800"/>
+                <a:spcPts val="1200"/>
               </a:spcAft>
               <a:buSzPct val="100000"/>
               <a:buChar char="●"/>
             </a:pPr>
             <a:r>
-              <a:rPr lang="en-US" sz="1800" dirty="0">
+              <a:rPr lang="en-US" sz="2400" dirty="0">
                 <a:solidFill>
                   <a:srgbClr val="262422"/>
                 </a:solidFill>
@@ -2439,7 +2439,7 @@
               </a:rPr>
               <a:t>Week 4: Review against your baseline. Keep, change or stop.</a:t>
             </a:r>
-            <a:endParaRPr lang="en-US" sz="1800" dirty="0"/>
+            <a:endParaRPr lang="en-US" sz="2400" dirty="0"/>
           </a:p>
         </p:txBody>
       </p:sp>
@@ -2578,7 +2578,7 @@
               <a:buNone/>
             </a:pPr>
             <a:r>
-              <a:rPr lang="en-US" sz="3600" b="1" dirty="0">
+              <a:rPr lang="en-US" sz="4400" b="1" dirty="0">
                 <a:solidFill>
                   <a:srgbClr val="262422"/>
                 </a:solidFill>
@@ -2588,7 +2588,7 @@
               </a:rPr>
               <a:t>Practice without personal data.</a:t>
             </a:r>
-            <a:endParaRPr lang="en-US" sz="3600" dirty="0"/>
+            <a:endParaRPr lang="en-US" sz="4400" dirty="0"/>
           </a:p>
         </p:txBody>
       </p:sp>
@@ -2600,7 +2600,7 @@
         </p:nvSpPr>
         <p:spPr>
           <a:xfrm>
-            <a:off x="548640" y="2377440"/>
+            <a:off x="548640" y="2468880"/>
             <a:ext cx="10515600" cy="3383280"/>
           </a:xfrm>
           <a:prstGeom prst="rect">
@@ -2615,13 +2615,13 @@
           <a:p>
             <a:pPr marL="342900" indent="-342900">
               <a:spcAft>
-                <a:spcPts val="800"/>
+                <a:spcPts val="1200"/>
               </a:spcAft>
               <a:buSzPct val="100000"/>
               <a:buChar char="●"/>
             </a:pPr>
             <a:r>
-              <a:rPr lang="en-US" sz="1800" dirty="0">
+              <a:rPr lang="en-US" sz="2400" dirty="0">
                 <a:solidFill>
                   <a:srgbClr val="262422"/>
                 </a:solidFill>
@@ -2631,18 +2631,18 @@
               </a:rPr>
               <a:t>Anonymised or fictional examples. No client personal data.</a:t>
             </a:r>
-            <a:endParaRPr lang="en-US" sz="1800" dirty="0"/>
+            <a:endParaRPr lang="en-US" sz="2400" dirty="0"/>
           </a:p>
           <a:p>
             <a:pPr marL="342900" indent="-342900">
               <a:spcAft>
-                <a:spcPts val="800"/>
+                <a:spcPts val="1200"/>
               </a:spcAft>
               <a:buSzPct val="100000"/>
               <a:buChar char="●"/>
             </a:pPr>
             <a:r>
-              <a:rPr lang="en-US" sz="1800" dirty="0">
+              <a:rPr lang="en-US" sz="2400" dirty="0">
                 <a:solidFill>
                   <a:srgbClr val="262422"/>
                 </a:solidFill>
@@ -2652,18 +2652,18 @@
               </a:rPr>
               <a:t>Written data-handling terms before work starts.</a:t>
             </a:r>
-            <a:endParaRPr lang="en-US" sz="1800" dirty="0"/>
+            <a:endParaRPr lang="en-US" sz="2400" dirty="0"/>
           </a:p>
           <a:p>
             <a:pPr marL="342900" indent="-342900">
               <a:spcAft>
-                <a:spcPts val="800"/>
+                <a:spcPts val="1200"/>
               </a:spcAft>
               <a:buSzPct val="100000"/>
               <a:buChar char="●"/>
             </a:pPr>
             <a:r>
-              <a:rPr lang="en-US" sz="1800" dirty="0">
+              <a:rPr lang="en-US" sz="2400" dirty="0">
                 <a:solidFill>
                   <a:srgbClr val="262422"/>
                 </a:solidFill>
@@ -2673,18 +2673,18 @@
               </a:rPr>
               <a:t>UK: UK GDPR and Data Protection Act 2018 apply to your client data.</a:t>
             </a:r>
-            <a:endParaRPr lang="en-US" sz="1800" dirty="0"/>
+            <a:endParaRPr lang="en-US" sz="2400" dirty="0"/>
           </a:p>
           <a:p>
             <a:pPr marL="342900" indent="-342900">
               <a:spcAft>
-                <a:spcPts val="800"/>
+                <a:spcPts val="1200"/>
               </a:spcAft>
               <a:buSzPct val="100000"/>
               <a:buChar char="●"/>
             </a:pPr>
             <a:r>
-              <a:rPr lang="en-US" sz="1800" dirty="0">
+              <a:rPr lang="en-US" sz="2400" dirty="0">
                 <a:solidFill>
                   <a:srgbClr val="262422"/>
                 </a:solidFill>
@@ -2694,18 +2694,18 @@
               </a:rPr>
               <a:t>Nigeria: Nigeria Data Protection Act 2023 applies.</a:t>
             </a:r>
-            <a:endParaRPr lang="en-US" sz="1800" dirty="0"/>
+            <a:endParaRPr lang="en-US" sz="2400" dirty="0"/>
           </a:p>
           <a:p>
             <a:pPr marL="342900" indent="-342900">
               <a:spcAft>
-                <a:spcPts val="800"/>
+                <a:spcPts val="1200"/>
               </a:spcAft>
               <a:buSzPct val="100000"/>
               <a:buChar char="●"/>
             </a:pPr>
             <a:r>
-              <a:rPr lang="en-US" sz="1800" dirty="0">
+              <a:rPr lang="en-US" sz="2400" dirty="0">
                 <a:solidFill>
                   <a:srgbClr val="262422"/>
                 </a:solidFill>
@@ -2715,7 +2715,7 @@
               </a:rPr>
               <a:t>We teach your team to follow your rules. This is not legal advice.</a:t>
             </a:r>
-            <a:endParaRPr lang="en-US" sz="1800" dirty="0"/>
+            <a:endParaRPr lang="en-US" sz="2400" dirty="0"/>
           </a:p>
         </p:txBody>
       </p:sp>
@@ -2854,7 +2854,7 @@
               <a:buNone/>
             </a:pPr>
             <a:r>
-              <a:rPr lang="en-US" sz="3600" b="1" dirty="0">
+              <a:rPr lang="en-US" sz="4400" b="1" dirty="0">
                 <a:solidFill>
                   <a:srgbClr val="F1EFEA"/>
                 </a:solidFill>
@@ -2864,7 +2864,7 @@
               </a:rPr>
               <a:t>Honest about what we are.</a:t>
             </a:r>
-            <a:endParaRPr lang="en-US" sz="3600" dirty="0"/>
+            <a:endParaRPr lang="en-US" sz="4400" dirty="0"/>
           </a:p>
         </p:txBody>
       </p:sp>
@@ -2876,7 +2876,7 @@
         </p:nvSpPr>
         <p:spPr>
           <a:xfrm>
-            <a:off x="548640" y="2377440"/>
+            <a:off x="548640" y="2468880"/>
             <a:ext cx="10515600" cy="3383280"/>
           </a:xfrm>
           <a:prstGeom prst="rect">
@@ -2891,13 +2891,13 @@
           <a:p>
             <a:pPr marL="342900" indent="-342900">
               <a:spcAft>
-                <a:spcPts val="800"/>
+                <a:spcPts val="1200"/>
               </a:spcAft>
               <a:buSzPct val="100000"/>
               <a:buChar char="●"/>
             </a:pPr>
             <a:r>
-              <a:rPr lang="en-US" sz="1800" dirty="0">
+              <a:rPr lang="en-US" sz="2400" dirty="0">
                 <a:solidFill>
                   <a:srgbClr val="F1EFEA"/>
                 </a:solidFill>
@@ -2907,18 +2907,18 @@
               </a:rPr>
               <a:t>We are new. No client case studies yet.</a:t>
             </a:r>
-            <a:endParaRPr lang="en-US" sz="1800" dirty="0"/>
+            <a:endParaRPr lang="en-US" sz="2400" dirty="0"/>
           </a:p>
           <a:p>
             <a:pPr marL="342900" indent="-342900">
               <a:spcAft>
-                <a:spcPts val="800"/>
+                <a:spcPts val="1200"/>
               </a:spcAft>
               <a:buSzPct val="100000"/>
               <a:buChar char="●"/>
             </a:pPr>
             <a:r>
-              <a:rPr lang="en-US" sz="1800" dirty="0">
+              <a:rPr lang="en-US" sz="2400" dirty="0">
                 <a:solidFill>
                   <a:srgbClr val="F1EFEA"/>
                 </a:solidFill>
@@ -2928,18 +2928,18 @@
               </a:rPr>
               <a:t>No guarantees of productivity, savings or compliance.</a:t>
             </a:r>
-            <a:endParaRPr lang="en-US" sz="1800" dirty="0"/>
+            <a:endParaRPr lang="en-US" sz="2400" dirty="0"/>
           </a:p>
           <a:p>
             <a:pPr marL="342900" indent="-342900">
               <a:spcAft>
-                <a:spcPts val="800"/>
+                <a:spcPts val="1200"/>
               </a:spcAft>
               <a:buSzPct val="100000"/>
               <a:buChar char="●"/>
             </a:pPr>
             <a:r>
-              <a:rPr lang="en-US" sz="1800" dirty="0">
+              <a:rPr lang="en-US" sz="2400" dirty="0">
                 <a:solidFill>
                   <a:srgbClr val="F1EFEA"/>
                 </a:solidFill>
@@ -2949,18 +2949,18 @@
               </a:rPr>
               <a:t>We measure against your baseline, and report as it is.</a:t>
             </a:r>
-            <a:endParaRPr lang="en-US" sz="1800" dirty="0"/>
+            <a:endParaRPr lang="en-US" sz="2400" dirty="0"/>
           </a:p>
           <a:p>
             <a:pPr marL="342900" indent="-342900">
               <a:spcAft>
-                <a:spcPts val="800"/>
+                <a:spcPts val="1200"/>
               </a:spcAft>
               <a:buSzPct val="100000"/>
               <a:buChar char="●"/>
             </a:pPr>
             <a:r>
-              <a:rPr lang="en-US" sz="1800" dirty="0">
+              <a:rPr lang="en-US" sz="2400" dirty="0">
                 <a:solidFill>
                   <a:srgbClr val="F1EFEA"/>
                 </a:solidFill>
@@ -2970,7 +2970,7 @@
               </a:rPr>
               <a:t>The onboarding platform is planned. Not built. Not for sale.</a:t>
             </a:r>
-            <a:endParaRPr lang="en-US" sz="1800" dirty="0"/>
+            <a:endParaRPr lang="en-US" sz="2400" dirty="0"/>
           </a:p>
         </p:txBody>
       </p:sp>
@@ -3109,7 +3109,7 @@
               <a:buNone/>
             </a:pPr>
             <a:r>
-              <a:rPr lang="en-US" sz="3600" b="1" dirty="0">
+              <a:rPr lang="en-US" sz="4400" b="1" dirty="0">
                 <a:solidFill>
                   <a:srgbClr val="262422"/>
                 </a:solidFill>
@@ -3119,7 +3119,7 @@
               </a:rPr>
               <a:t>Material your team keeps using.</a:t>
             </a:r>
-            <a:endParaRPr lang="en-US" sz="3600" dirty="0"/>
+            <a:endParaRPr lang="en-US" sz="4400" dirty="0"/>
           </a:p>
         </p:txBody>
       </p:sp>
@@ -3131,7 +3131,7 @@
         </p:nvSpPr>
         <p:spPr>
           <a:xfrm>
-            <a:off x="548640" y="2377440"/>
+            <a:off x="548640" y="2468880"/>
             <a:ext cx="10515600" cy="3383280"/>
           </a:xfrm>
           <a:prstGeom prst="rect">
@@ -3146,13 +3146,13 @@
           <a:p>
             <a:pPr marL="342900" indent="-342900">
               <a:spcAft>
-                <a:spcPts val="800"/>
+                <a:spcPts val="1200"/>
               </a:spcAft>
               <a:buSzPct val="100000"/>
               <a:buChar char="●"/>
             </a:pPr>
             <a:r>
-              <a:rPr lang="en-US" sz="1800" dirty="0">
+              <a:rPr lang="en-US" sz="2400" dirty="0">
                 <a:solidFill>
                   <a:srgbClr val="262422"/>
                 </a:solidFill>
@@ -3162,18 +3162,18 @@
               </a:rPr>
               <a:t>A practice plan built around your own workflows</a:t>
             </a:r>
-            <a:endParaRPr lang="en-US" sz="1800" dirty="0"/>
+            <a:endParaRPr lang="en-US" sz="2400" dirty="0"/>
           </a:p>
           <a:p>
             <a:pPr marL="342900" indent="-342900">
               <a:spcAft>
-                <a:spcPts val="800"/>
+                <a:spcPts val="1200"/>
               </a:spcAft>
               <a:buSzPct val="100000"/>
               <a:buChar char="●"/>
             </a:pPr>
             <a:r>
-              <a:rPr lang="en-US" sz="1800" dirty="0">
+              <a:rPr lang="en-US" sz="2400" dirty="0">
                 <a:solidFill>
                   <a:srgbClr val="262422"/>
                 </a:solidFill>
@@ -3183,18 +3183,18 @@
               </a:rPr>
               <a:t>Reusable briefs and checklists (workflow cards)</a:t>
             </a:r>
-            <a:endParaRPr lang="en-US" sz="1800" dirty="0"/>
+            <a:endParaRPr lang="en-US" sz="2400" dirty="0"/>
           </a:p>
           <a:p>
             <a:pPr marL="342900" indent="-342900">
               <a:spcAft>
-                <a:spcPts val="800"/>
+                <a:spcPts val="1200"/>
               </a:spcAft>
               <a:buSzPct val="100000"/>
               <a:buChar char="●"/>
             </a:pPr>
             <a:r>
-              <a:rPr lang="en-US" sz="1800" dirty="0">
+              <a:rPr lang="en-US" sz="2400" dirty="0">
                 <a:solidFill>
                   <a:srgbClr val="262422"/>
                 </a:solidFill>
@@ -3204,18 +3204,18 @@
               </a:rPr>
               <a:t>A written AI-use rule</a:t>
             </a:r>
-            <a:endParaRPr lang="en-US" sz="1800" dirty="0"/>
+            <a:endParaRPr lang="en-US" sz="2400" dirty="0"/>
           </a:p>
           <a:p>
             <a:pPr marL="342900" indent="-342900">
               <a:spcAft>
-                <a:spcPts val="800"/>
+                <a:spcPts val="1200"/>
               </a:spcAft>
               <a:buSzPct val="100000"/>
               <a:buChar char="●"/>
             </a:pPr>
             <a:r>
-              <a:rPr lang="en-US" sz="1800" dirty="0">
+              <a:rPr lang="en-US" sz="2400" dirty="0">
                 <a:solidFill>
                   <a:srgbClr val="262422"/>
                 </a:solidFill>
@@ -3225,18 +3225,18 @@
               </a:rPr>
               <a:t>Guided practice with checks against source</a:t>
             </a:r>
-            <a:endParaRPr lang="en-US" sz="1800" dirty="0"/>
+            <a:endParaRPr lang="en-US" sz="2400" dirty="0"/>
           </a:p>
           <a:p>
             <a:pPr marL="342900" indent="-342900">
               <a:spcAft>
-                <a:spcPts val="800"/>
+                <a:spcPts val="1200"/>
               </a:spcAft>
               <a:buSzPct val="100000"/>
               <a:buChar char="●"/>
             </a:pPr>
             <a:r>
-              <a:rPr lang="en-US" sz="1800" dirty="0">
+              <a:rPr lang="en-US" sz="2400" dirty="0">
                 <a:solidFill>
                   <a:srgbClr val="262422"/>
                 </a:solidFill>
@@ -3246,18 +3246,18 @@
               </a:rPr>
               <a:t>Optional live or remote sessions</a:t>
             </a:r>
-            <a:endParaRPr lang="en-US" sz="1800" dirty="0"/>
+            <a:endParaRPr lang="en-US" sz="2400" dirty="0"/>
           </a:p>
           <a:p>
             <a:pPr marL="342900" indent="-342900">
               <a:spcAft>
-                <a:spcPts val="800"/>
+                <a:spcPts val="1200"/>
               </a:spcAft>
               <a:buSzPct val="100000"/>
               <a:buChar char="●"/>
             </a:pPr>
             <a:r>
-              <a:rPr lang="en-US" sz="1800" dirty="0">
+              <a:rPr lang="en-US" sz="2400" dirty="0">
                 <a:solidFill>
                   <a:srgbClr val="262422"/>
                 </a:solidFill>
@@ -3267,7 +3267,7 @@
               </a:rPr>
               <a:t>A short review of what changed</a:t>
             </a:r>
-            <a:endParaRPr lang="en-US" sz="1800" dirty="0"/>
+            <a:endParaRPr lang="en-US" sz="2400" dirty="0"/>
           </a:p>
         </p:txBody>
       </p:sp>
@@ -3406,7 +3406,7 @@
               <a:buNone/>
             </a:pPr>
             <a:r>
-              <a:rPr lang="en-US" sz="3600" b="1" dirty="0">
+              <a:rPr lang="en-US" sz="4400" b="1" dirty="0">
                 <a:solidFill>
                   <a:srgbClr val="F1EFEA"/>
                 </a:solidFill>
@@ -3416,7 +3416,7 @@
               </a:rPr>
               <a:t>See it on your own workflows.</a:t>
             </a:r>
-            <a:endParaRPr lang="en-US" sz="3600" dirty="0"/>
+            <a:endParaRPr lang="en-US" sz="4400" dirty="0"/>
           </a:p>
         </p:txBody>
       </p:sp>
@@ -3428,7 +3428,7 @@
         </p:nvSpPr>
         <p:spPr>
           <a:xfrm>
-            <a:off x="548640" y="2377440"/>
+            <a:off x="548640" y="2468880"/>
             <a:ext cx="10515600" cy="3383280"/>
           </a:xfrm>
           <a:prstGeom prst="rect">
@@ -3443,13 +3443,13 @@
           <a:p>
             <a:pPr marL="342900" indent="-342900">
               <a:spcAft>
-                <a:spcPts val="800"/>
+                <a:spcPts val="1200"/>
               </a:spcAft>
               <a:buSzPct val="100000"/>
               <a:buChar char="●"/>
             </a:pPr>
             <a:r>
-              <a:rPr lang="en-US" sz="1800" dirty="0">
+              <a:rPr lang="en-US" sz="2400" dirty="0">
                 <a:solidFill>
                   <a:srgbClr val="F1EFEA"/>
                 </a:solidFill>
@@ -3459,18 +3459,18 @@
               </a:rPr>
               <a:t>Try the free exercise: [WEBSITE]/learn/first-workflow</a:t>
             </a:r>
-            <a:endParaRPr lang="en-US" sz="1800" dirty="0"/>
+            <a:endParaRPr lang="en-US" sz="2400" dirty="0"/>
           </a:p>
           <a:p>
             <a:pPr marL="342900" indent="-342900">
               <a:spcAft>
-                <a:spcPts val="800"/>
+                <a:spcPts val="1200"/>
               </a:spcAft>
               <a:buSzPct val="100000"/>
               <a:buChar char="●"/>
             </a:pPr>
             <a:r>
-              <a:rPr lang="en-US" sz="1800" dirty="0">
+              <a:rPr lang="en-US" sz="2400" dirty="0">
                 <a:solidFill>
                   <a:srgbClr val="F1EFEA"/>
                 </a:solidFill>
@@ -3480,18 +3480,18 @@
               </a:rPr>
               <a:t>Take the free assessment: [WEBSITE]/business/assessment</a:t>
             </a:r>
-            <a:endParaRPr lang="en-US" sz="1800" dirty="0"/>
+            <a:endParaRPr lang="en-US" sz="2400" dirty="0"/>
           </a:p>
           <a:p>
             <a:pPr marL="342900" indent="-342900">
               <a:spcAft>
-                <a:spcPts val="800"/>
+                <a:spcPts val="1200"/>
               </a:spcAft>
               <a:buSzPct val="100000"/>
               <a:buChar char="●"/>
             </a:pPr>
             <a:r>
-              <a:rPr lang="en-US" sz="1800" dirty="0">
+              <a:rPr lang="en-US" sz="2400" dirty="0">
                 <a:solidFill>
                   <a:srgbClr val="F1EFEA"/>
                 </a:solidFill>
@@ -3501,7 +3501,7 @@
               </a:rPr>
               <a:t>Book a 30-minute conversation: [BUSINESS EMAIL]</a:t>
             </a:r>
-            <a:endParaRPr lang="en-US" sz="1800" dirty="0"/>
+            <a:endParaRPr lang="en-US" sz="2400" dirty="0"/>
           </a:p>
         </p:txBody>
       </p:sp>
@@ -3679,7 +3679,7 @@
               <a:buNone/>
             </a:pPr>
             <a:r>
-              <a:rPr lang="en-US" sz="3600" b="1" dirty="0">
+              <a:rPr lang="en-US" sz="4400" b="1" dirty="0">
                 <a:solidFill>
                   <a:srgbClr val="262422"/>
                 </a:solidFill>
@@ -3689,7 +3689,7 @@
               </a:rPr>
               <a:t>What we expect to hear. Tell us what is true.</a:t>
             </a:r>
-            <a:endParaRPr lang="en-US" sz="3600" dirty="0"/>
+            <a:endParaRPr lang="en-US" sz="4400" dirty="0"/>
           </a:p>
         </p:txBody>
       </p:sp>
@@ -3701,7 +3701,7 @@
         </p:nvSpPr>
         <p:spPr>
           <a:xfrm>
-            <a:off x="548640" y="2377440"/>
+            <a:off x="548640" y="2468880"/>
             <a:ext cx="10515600" cy="3383280"/>
           </a:xfrm>
           <a:prstGeom prst="rect">
@@ -3716,13 +3716,13 @@
           <a:p>
             <a:pPr marL="342900" indent="-342900">
               <a:spcAft>
-                <a:spcPts val="800"/>
+                <a:spcPts val="1200"/>
               </a:spcAft>
               <a:buSzPct val="100000"/>
               <a:buChar char="●"/>
             </a:pPr>
             <a:r>
-              <a:rPr lang="en-US" sz="1800" dirty="0">
+              <a:rPr lang="en-US" sz="2400" dirty="0">
                 <a:solidFill>
                   <a:srgbClr val="262422"/>
                 </a:solidFill>
@@ -3732,18 +3732,18 @@
               </a:rPr>
               <a:t>Staff already use AI tools, with no shared rules.</a:t>
             </a:r>
-            <a:endParaRPr lang="en-US" sz="1800" dirty="0"/>
+            <a:endParaRPr lang="en-US" sz="2400" dirty="0"/>
           </a:p>
           <a:p>
             <a:pPr marL="342900" indent="-342900">
               <a:spcAft>
-                <a:spcPts val="800"/>
+                <a:spcPts val="1200"/>
               </a:spcAft>
               <a:buSzPct val="100000"/>
               <a:buChar char="●"/>
             </a:pPr>
             <a:r>
-              <a:rPr lang="en-US" sz="1800" dirty="0">
+              <a:rPr lang="en-US" sz="2400" dirty="0">
                 <a:solidFill>
                   <a:srgbClr val="262422"/>
                 </a:solidFill>
@@ -3753,18 +3753,18 @@
               </a:rPr>
               <a:t>Listings read differently from one negotiator to the next.</a:t>
             </a:r>
-            <a:endParaRPr lang="en-US" sz="1800" dirty="0"/>
+            <a:endParaRPr lang="en-US" sz="2400" dirty="0"/>
           </a:p>
           <a:p>
             <a:pPr marL="342900" indent="-342900">
               <a:spcAft>
-                <a:spcPts val="800"/>
+                <a:spcPts val="1200"/>
               </a:spcAft>
               <a:buSzPct val="100000"/>
               <a:buChar char="●"/>
             </a:pPr>
             <a:r>
-              <a:rPr lang="en-US" sz="1800" dirty="0">
+              <a:rPr lang="en-US" sz="2400" dirty="0">
                 <a:solidFill>
                   <a:srgbClr val="262422"/>
                 </a:solidFill>
@@ -3774,18 +3774,18 @@
               </a:rPr>
               <a:t>New starters take a long time to work independently.</a:t>
             </a:r>
-            <a:endParaRPr lang="en-US" sz="1800" dirty="0"/>
+            <a:endParaRPr lang="en-US" sz="2400" dirty="0"/>
           </a:p>
           <a:p>
             <a:pPr marL="342900" indent="-342900">
               <a:spcAft>
-                <a:spcPts val="800"/>
+                <a:spcPts val="1200"/>
               </a:spcAft>
               <a:buSzPct val="100000"/>
               <a:buChar char="●"/>
             </a:pPr>
             <a:r>
-              <a:rPr lang="en-US" sz="1800" dirty="0">
+              <a:rPr lang="en-US" sz="2400" dirty="0">
                 <a:solidFill>
                   <a:srgbClr val="262422"/>
                 </a:solidFill>
@@ -3795,7 +3795,7 @@
               </a:rPr>
               <a:t>Training that is one talk does not stick.</a:t>
             </a:r>
-            <a:endParaRPr lang="en-US" sz="1800" dirty="0"/>
+            <a:endParaRPr lang="en-US" sz="2400" dirty="0"/>
           </a:p>
         </p:txBody>
       </p:sp>
@@ -3973,7 +3973,7 @@
               <a:buNone/>
             </a:pPr>
             <a:r>
-              <a:rPr lang="en-US" sz="3600" b="1" dirty="0">
+              <a:rPr lang="en-US" sz="4400" b="1" dirty="0">
                 <a:solidFill>
                   <a:srgbClr val="262422"/>
                 </a:solidFill>
@@ -3983,7 +3983,7 @@
               </a:rPr>
               <a:t>A new company teaching AI by doing real work.</a:t>
             </a:r>
-            <a:endParaRPr lang="en-US" sz="3600" dirty="0"/>
+            <a:endParaRPr lang="en-US" sz="4400" dirty="0"/>
           </a:p>
         </p:txBody>
       </p:sp>
@@ -3995,7 +3995,7 @@
         </p:nvSpPr>
         <p:spPr>
           <a:xfrm>
-            <a:off x="548640" y="2377440"/>
+            <a:off x="548640" y="2468880"/>
             <a:ext cx="10515600" cy="3383280"/>
           </a:xfrm>
           <a:prstGeom prst="rect">
@@ -4010,13 +4010,13 @@
           <a:p>
             <a:pPr marL="342900" indent="-342900">
               <a:spcAft>
-                <a:spcPts val="800"/>
+                <a:spcPts val="1200"/>
               </a:spcAft>
               <a:buSzPct val="100000"/>
               <a:buChar char="●"/>
             </a:pPr>
             <a:r>
-              <a:rPr lang="en-US" sz="1800" dirty="0">
+              <a:rPr lang="en-US" sz="2400" dirty="0">
                 <a:solidFill>
                   <a:srgbClr val="262422"/>
                 </a:solidFill>
@@ -4026,18 +4026,18 @@
               </a:rPr>
               <a:t>Task first: every lesson starts from a job someone actually has.</a:t>
             </a:r>
-            <a:endParaRPr lang="en-US" sz="1800" dirty="0"/>
+            <a:endParaRPr lang="en-US" sz="2400" dirty="0"/>
           </a:p>
           <a:p>
             <a:pPr marL="342900" indent="-342900">
               <a:spcAft>
-                <a:spcPts val="800"/>
+                <a:spcPts val="1200"/>
               </a:spcAft>
               <a:buSzPct val="100000"/>
               <a:buChar char="●"/>
             </a:pPr>
             <a:r>
-              <a:rPr lang="en-US" sz="1800" dirty="0">
+              <a:rPr lang="en-US" sz="2400" dirty="0">
                 <a:solidFill>
                   <a:srgbClr val="262422"/>
                 </a:solidFill>
@@ -4047,18 +4047,18 @@
               </a:rPr>
               <a:t>Checking is part of the method.</a:t>
             </a:r>
-            <a:endParaRPr lang="en-US" sz="1800" dirty="0"/>
+            <a:endParaRPr lang="en-US" sz="2400" dirty="0"/>
           </a:p>
           <a:p>
             <a:pPr marL="342900" indent="-342900">
               <a:spcAft>
-                <a:spcPts val="800"/>
+                <a:spcPts val="1200"/>
               </a:spcAft>
               <a:buSzPct val="100000"/>
               <a:buChar char="●"/>
             </a:pPr>
             <a:r>
-              <a:rPr lang="en-US" sz="1800" dirty="0">
+              <a:rPr lang="en-US" sz="2400" dirty="0">
                 <a:solidFill>
                   <a:srgbClr val="262422"/>
                 </a:solidFill>
@@ -4068,18 +4068,18 @@
               </a:rPr>
               <a:t>Independent: no tool vendor sponsors our advice.</a:t>
             </a:r>
-            <a:endParaRPr lang="en-US" sz="1800" dirty="0"/>
+            <a:endParaRPr lang="en-US" sz="2400" dirty="0"/>
           </a:p>
           <a:p>
             <a:pPr marL="342900" indent="-342900">
               <a:spcAft>
-                <a:spcPts val="800"/>
+                <a:spcPts val="1200"/>
               </a:spcAft>
               <a:buSzPct val="100000"/>
               <a:buChar char="●"/>
             </a:pPr>
             <a:r>
-              <a:rPr lang="en-US" sz="1800" dirty="0">
+              <a:rPr lang="en-US" sz="2400" dirty="0">
                 <a:solidFill>
                   <a:srgbClr val="262422"/>
                 </a:solidFill>
@@ -4089,7 +4089,7 @@
               </a:rPr>
               <a:t>Works on modest means: free tiers, mobile-friendly.</a:t>
             </a:r>
-            <a:endParaRPr lang="en-US" sz="1800" dirty="0"/>
+            <a:endParaRPr lang="en-US" sz="2400" dirty="0"/>
           </a:p>
         </p:txBody>
       </p:sp>
@@ -4228,7 +4228,7 @@
               <a:buNone/>
             </a:pPr>
             <a:r>
-              <a:rPr lang="en-US" sz="3600" b="1" dirty="0">
+              <a:rPr lang="en-US" sz="4400" b="1" dirty="0">
                 <a:solidFill>
                   <a:srgbClr val="262422"/>
                 </a:solidFill>
@@ -4238,7 +4238,7 @@
               </a:rPr>
               <a:t>Brief. Run. Check. Keep.</a:t>
             </a:r>
-            <a:endParaRPr lang="en-US" sz="3600" dirty="0"/>
+            <a:endParaRPr lang="en-US" sz="4400" dirty="0"/>
           </a:p>
         </p:txBody>
       </p:sp>
@@ -4250,7 +4250,7 @@
         </p:nvSpPr>
         <p:spPr>
           <a:xfrm>
-            <a:off x="548640" y="2377440"/>
+            <a:off x="548640" y="2468880"/>
             <a:ext cx="10515600" cy="3383280"/>
           </a:xfrm>
           <a:prstGeom prst="rect">
@@ -4265,13 +4265,13 @@
           <a:p>
             <a:pPr marL="342900" indent="-342900">
               <a:spcAft>
-                <a:spcPts val="800"/>
+                <a:spcPts val="1200"/>
               </a:spcAft>
               <a:buSzPct val="100000"/>
               <a:buChar char="●"/>
             </a:pPr>
             <a:r>
-              <a:rPr lang="en-US" sz="1800" dirty="0">
+              <a:rPr lang="en-US" sz="2400" dirty="0">
                 <a:solidFill>
                   <a:srgbClr val="262422"/>
                 </a:solidFill>
@@ -4281,18 +4281,18 @@
               </a:rPr>
               <a:t>Brief: write a clear instruction, including what the tool must not do.</a:t>
             </a:r>
-            <a:endParaRPr lang="en-US" sz="1800" dirty="0"/>
+            <a:endParaRPr lang="en-US" sz="2400" dirty="0"/>
           </a:p>
           <a:p>
             <a:pPr marL="342900" indent="-342900">
               <a:spcAft>
-                <a:spcPts val="800"/>
+                <a:spcPts val="1200"/>
               </a:spcAft>
               <a:buSzPct val="100000"/>
               <a:buChar char="●"/>
             </a:pPr>
             <a:r>
-              <a:rPr lang="en-US" sz="1800" dirty="0">
+              <a:rPr lang="en-US" sz="2400" dirty="0">
                 <a:solidFill>
                   <a:srgbClr val="262422"/>
                 </a:solidFill>
@@ -4302,18 +4302,18 @@
               </a:rPr>
               <a:t>Run: use an approved tool on a real, anonymised example.</a:t>
             </a:r>
-            <a:endParaRPr lang="en-US" sz="1800" dirty="0"/>
+            <a:endParaRPr lang="en-US" sz="2400" dirty="0"/>
           </a:p>
           <a:p>
             <a:pPr marL="342900" indent="-342900">
               <a:spcAft>
-                <a:spcPts val="800"/>
+                <a:spcPts val="1200"/>
               </a:spcAft>
               <a:buSzPct val="100000"/>
               <a:buChar char="●"/>
             </a:pPr>
             <a:r>
-              <a:rPr lang="en-US" sz="1800" dirty="0">
+              <a:rPr lang="en-US" sz="2400" dirty="0">
                 <a:solidFill>
                   <a:srgbClr val="262422"/>
                 </a:solidFill>
@@ -4323,18 +4323,18 @@
               </a:rPr>
               <a:t>Check: compare every claim with the source.</a:t>
             </a:r>
-            <a:endParaRPr lang="en-US" sz="1800" dirty="0"/>
+            <a:endParaRPr lang="en-US" sz="2400" dirty="0"/>
           </a:p>
           <a:p>
             <a:pPr marL="342900" indent="-342900">
               <a:spcAft>
-                <a:spcPts val="800"/>
+                <a:spcPts val="1200"/>
               </a:spcAft>
               <a:buSzPct val="100000"/>
               <a:buChar char="●"/>
             </a:pPr>
             <a:r>
-              <a:rPr lang="en-US" sz="1800" dirty="0">
+              <a:rPr lang="en-US" sz="2400" dirty="0">
                 <a:solidFill>
                   <a:srgbClr val="262422"/>
                 </a:solidFill>
@@ -4344,7 +4344,7 @@
               </a:rPr>
               <a:t>Keep: save what worked as a workflow card.</a:t>
             </a:r>
-            <a:endParaRPr lang="en-US" sz="1800" dirty="0"/>
+            <a:endParaRPr lang="en-US" sz="2400" dirty="0"/>
           </a:p>
         </p:txBody>
       </p:sp>
@@ -4483,7 +4483,7 @@
               <a:buNone/>
             </a:pPr>
             <a:r>
-              <a:rPr lang="en-US" sz="3600" b="1" dirty="0">
+              <a:rPr lang="en-US" sz="4400" b="1" dirty="0">
                 <a:solidFill>
                   <a:srgbClr val="F1EFEA"/>
                 </a:solidFill>
@@ -4493,7 +4493,7 @@
               </a:rPr>
               <a:t>AI drafts. People decide.</a:t>
             </a:r>
-            <a:endParaRPr lang="en-US" sz="3600" dirty="0"/>
+            <a:endParaRPr lang="en-US" sz="4400" dirty="0"/>
           </a:p>
         </p:txBody>
       </p:sp>
@@ -4505,7 +4505,7 @@
         </p:nvSpPr>
         <p:spPr>
           <a:xfrm>
-            <a:off x="548640" y="2377440"/>
+            <a:off x="548640" y="2468880"/>
             <a:ext cx="10515600" cy="3383280"/>
           </a:xfrm>
           <a:prstGeom prst="rect">
@@ -4520,13 +4520,13 @@
           <a:p>
             <a:pPr marL="342900" indent="-342900">
               <a:spcAft>
-                <a:spcPts val="800"/>
+                <a:spcPts val="1200"/>
               </a:spcAft>
               <a:buSzPct val="100000"/>
               <a:buChar char="●"/>
             </a:pPr>
             <a:r>
-              <a:rPr lang="en-US" sz="1800" dirty="0">
+              <a:rPr lang="en-US" sz="2400" dirty="0">
                 <a:solidFill>
                   <a:srgbClr val="F1EFEA"/>
                 </a:solidFill>
@@ -4536,7 +4536,7 @@
               </a:rPr>
               <a:t>We never suggest AI should value a property, give legal advice, or approve an offer, tenancy or transaction.</a:t>
             </a:r>
-            <a:endParaRPr lang="en-US" sz="1800" dirty="0"/>
+            <a:endParaRPr lang="en-US" sz="2400" dirty="0"/>
           </a:p>
         </p:txBody>
       </p:sp>
@@ -4675,7 +4675,7 @@
               <a:buNone/>
             </a:pPr>
             <a:r>
-              <a:rPr lang="en-US" sz="3600" b="1" dirty="0">
+              <a:rPr lang="en-US" sz="4400" b="1" dirty="0">
                 <a:solidFill>
                   <a:srgbClr val="262422"/>
                 </a:solidFill>
@@ -4685,7 +4685,7 @@
               </a:rPr>
               <a:t>Seven everyday tasks. A clear line between tool and person.</a:t>
             </a:r>
-            <a:endParaRPr lang="en-US" sz="3600" dirty="0"/>
+            <a:endParaRPr lang="en-US" sz="4400" dirty="0"/>
           </a:p>
         </p:txBody>
       </p:sp>
@@ -4697,7 +4697,7 @@
         </p:nvSpPr>
         <p:spPr>
           <a:xfrm>
-            <a:off x="548640" y="2377440"/>
+            <a:off x="548640" y="2468880"/>
             <a:ext cx="10515600" cy="3383280"/>
           </a:xfrm>
           <a:prstGeom prst="rect">
@@ -4712,13 +4712,13 @@
           <a:p>
             <a:pPr marL="342900" indent="-342900">
               <a:spcAft>
-                <a:spcPts val="800"/>
+                <a:spcPts val="1200"/>
               </a:spcAft>
               <a:buSzPct val="100000"/>
               <a:buChar char="●"/>
             </a:pPr>
             <a:r>
-              <a:rPr lang="en-US" sz="1800" dirty="0">
+              <a:rPr lang="en-US" sz="2400" dirty="0">
                 <a:solidFill>
                   <a:srgbClr val="262422"/>
                 </a:solidFill>
@@ -4728,18 +4728,18 @@
               </a:rPr>
               <a:t>Listings from verified facts</a:t>
             </a:r>
-            <a:endParaRPr lang="en-US" sz="1800" dirty="0"/>
+            <a:endParaRPr lang="en-US" sz="2400" dirty="0"/>
           </a:p>
           <a:p>
             <a:pPr marL="342900" indent="-342900">
               <a:spcAft>
-                <a:spcPts val="800"/>
+                <a:spcPts val="1200"/>
               </a:spcAft>
               <a:buSzPct val="100000"/>
               <a:buChar char="●"/>
             </a:pPr>
             <a:r>
-              <a:rPr lang="en-US" sz="1800" dirty="0">
+              <a:rPr lang="en-US" sz="2400" dirty="0">
                 <a:solidFill>
                   <a:srgbClr val="262422"/>
                 </a:solidFill>
@@ -4749,18 +4749,18 @@
               </a:rPr>
               <a:t>Enquiries and lead follow-up</a:t>
             </a:r>
-            <a:endParaRPr lang="en-US" sz="1800" dirty="0"/>
+            <a:endParaRPr lang="en-US" sz="2400" dirty="0"/>
           </a:p>
           <a:p>
             <a:pPr marL="342900" indent="-342900">
               <a:spcAft>
-                <a:spcPts val="800"/>
+                <a:spcPts val="1200"/>
               </a:spcAft>
               <a:buSzPct val="100000"/>
               <a:buChar char="●"/>
             </a:pPr>
             <a:r>
-              <a:rPr lang="en-US" sz="1800" dirty="0">
+              <a:rPr lang="en-US" sz="2400" dirty="0">
                 <a:solidFill>
                   <a:srgbClr val="262422"/>
                 </a:solidFill>
@@ -4770,18 +4770,18 @@
               </a:rPr>
               <a:t>Viewing feedback and updates</a:t>
             </a:r>
-            <a:endParaRPr lang="en-US" sz="1800" dirty="0"/>
+            <a:endParaRPr lang="en-US" sz="2400" dirty="0"/>
           </a:p>
           <a:p>
             <a:pPr marL="342900" indent="-342900">
               <a:spcAft>
-                <a:spcPts val="800"/>
+                <a:spcPts val="1200"/>
               </a:spcAft>
               <a:buSzPct val="100000"/>
               <a:buChar char="●"/>
             </a:pPr>
             <a:r>
-              <a:rPr lang="en-US" sz="1800" dirty="0">
+              <a:rPr lang="en-US" sz="2400" dirty="0">
                 <a:solidFill>
                   <a:srgbClr val="262422"/>
                 </a:solidFill>
@@ -4791,18 +4791,18 @@
               </a:rPr>
               <a:t>Research and organising information</a:t>
             </a:r>
-            <a:endParaRPr lang="en-US" sz="1800" dirty="0"/>
+            <a:endParaRPr lang="en-US" sz="2400" dirty="0"/>
           </a:p>
           <a:p>
             <a:pPr marL="342900" indent="-342900">
               <a:spcAft>
-                <a:spcPts val="800"/>
+                <a:spcPts val="1200"/>
               </a:spcAft>
               <a:buSzPct val="100000"/>
               <a:buChar char="●"/>
             </a:pPr>
             <a:r>
-              <a:rPr lang="en-US" sz="1800" dirty="0">
+              <a:rPr lang="en-US" sz="2400" dirty="0">
                 <a:solidFill>
                   <a:srgbClr val="262422"/>
                 </a:solidFill>
@@ -4812,18 +4812,18 @@
               </a:rPr>
               <a:t>Internal documents and reports</a:t>
             </a:r>
-            <a:endParaRPr lang="en-US" sz="1800" dirty="0"/>
+            <a:endParaRPr lang="en-US" sz="2400" dirty="0"/>
           </a:p>
           <a:p>
             <a:pPr marL="342900" indent="-342900">
               <a:spcAft>
-                <a:spcPts val="800"/>
+                <a:spcPts val="1200"/>
               </a:spcAft>
               <a:buSzPct val="100000"/>
               <a:buChar char="●"/>
             </a:pPr>
             <a:r>
-              <a:rPr lang="en-US" sz="1800" dirty="0">
+              <a:rPr lang="en-US" sz="2400" dirty="0">
                 <a:solidFill>
                   <a:srgbClr val="262422"/>
                 </a:solidFill>
@@ -4833,18 +4833,18 @@
               </a:rPr>
               <a:t>Procedures and new-starter guides</a:t>
             </a:r>
-            <a:endParaRPr lang="en-US" sz="1800" dirty="0"/>
+            <a:endParaRPr lang="en-US" sz="2400" dirty="0"/>
           </a:p>
           <a:p>
             <a:pPr marL="342900" indent="-342900">
               <a:spcAft>
-                <a:spcPts val="800"/>
+                <a:spcPts val="1200"/>
               </a:spcAft>
               <a:buSzPct val="100000"/>
               <a:buChar char="●"/>
             </a:pPr>
             <a:r>
-              <a:rPr lang="en-US" sz="1800" dirty="0">
+              <a:rPr lang="en-US" sz="2400" dirty="0">
                 <a:solidFill>
                   <a:srgbClr val="262422"/>
                 </a:solidFill>
@@ -4854,7 +4854,7 @@
               </a:rPr>
               <a:t>Marketing content and posts</a:t>
             </a:r>
-            <a:endParaRPr lang="en-US" sz="1800" dirty="0"/>
+            <a:endParaRPr lang="en-US" sz="2400" dirty="0"/>
           </a:p>
         </p:txBody>
       </p:sp>
@@ -5032,7 +5032,7 @@
               <a:buNone/>
             </a:pPr>
             <a:r>
-              <a:rPr lang="en-US" sz="3600" b="1" dirty="0">
+              <a:rPr lang="en-US" sz="4400" b="1" dirty="0">
                 <a:solidFill>
                   <a:srgbClr val="262422"/>
                 </a:solidFill>
@@ -5042,7 +5042,7 @@
               </a:rPr>
               <a:t>From verified facts to a checked draft.</a:t>
             </a:r>
-            <a:endParaRPr lang="en-US" sz="3600" dirty="0"/>
+            <a:endParaRPr lang="en-US" sz="4400" dirty="0"/>
           </a:p>
         </p:txBody>
       </p:sp>
@@ -5054,7 +5054,7 @@
         </p:nvSpPr>
         <p:spPr>
           <a:xfrm>
-            <a:off x="548640" y="2377440"/>
+            <a:off x="548640" y="2468880"/>
             <a:ext cx="10515600" cy="3383280"/>
           </a:xfrm>
           <a:prstGeom prst="rect">
@@ -5069,13 +5069,13 @@
           <a:p>
             <a:pPr marL="342900" indent="-342900">
               <a:spcAft>
-                <a:spcPts val="800"/>
+                <a:spcPts val="1200"/>
               </a:spcAft>
               <a:buSzPct val="100000"/>
               <a:buChar char="●"/>
             </a:pPr>
             <a:r>
-              <a:rPr lang="en-US" sz="1800" dirty="0">
+              <a:rPr lang="en-US" sz="2400" dirty="0">
                 <a:solidFill>
                   <a:srgbClr val="262422"/>
                 </a:solidFill>
@@ -5085,18 +5085,18 @@
               </a:rPr>
               <a:t>Brief: facts only, no invention, no neighbourhood comments.</a:t>
             </a:r>
-            <a:endParaRPr lang="en-US" sz="1800" dirty="0"/>
+            <a:endParaRPr lang="en-US" sz="2400" dirty="0"/>
           </a:p>
           <a:p>
             <a:pPr marL="342900" indent="-342900">
               <a:spcAft>
-                <a:spcPts val="800"/>
+                <a:spcPts val="1200"/>
               </a:spcAft>
               <a:buSzPct val="100000"/>
               <a:buChar char="●"/>
             </a:pPr>
             <a:r>
-              <a:rPr lang="en-US" sz="1800" dirty="0">
+              <a:rPr lang="en-US" sz="2400" dirty="0">
                 <a:solidFill>
                   <a:srgbClr val="262422"/>
                 </a:solidFill>
@@ -5106,18 +5106,18 @@
               </a:rPr>
               <a:t>Run: the same facts, the same brief, each person.</a:t>
             </a:r>
-            <a:endParaRPr lang="en-US" sz="1800" dirty="0"/>
+            <a:endParaRPr lang="en-US" sz="2400" dirty="0"/>
           </a:p>
           <a:p>
             <a:pPr marL="342900" indent="-342900">
               <a:spcAft>
-                <a:spcPts val="800"/>
+                <a:spcPts val="1200"/>
               </a:spcAft>
               <a:buSzPct val="100000"/>
               <a:buChar char="●"/>
             </a:pPr>
             <a:r>
-              <a:rPr lang="en-US" sz="1800" dirty="0">
+              <a:rPr lang="en-US" sz="2400" dirty="0">
                 <a:solidFill>
                   <a:srgbClr val="262422"/>
                 </a:solidFill>
@@ -5127,18 +5127,18 @@
               </a:rPr>
               <a:t>Check: is every claim in the fact sheet? What is missing?</a:t>
             </a:r>
-            <a:endParaRPr lang="en-US" sz="1800" dirty="0"/>
+            <a:endParaRPr lang="en-US" sz="2400" dirty="0"/>
           </a:p>
           <a:p>
             <a:pPr marL="342900" indent="-342900">
               <a:spcAft>
-                <a:spcPts val="800"/>
+                <a:spcPts val="1200"/>
               </a:spcAft>
               <a:buSzPct val="100000"/>
               <a:buChar char="●"/>
             </a:pPr>
             <a:r>
-              <a:rPr lang="en-US" sz="1800" dirty="0">
+              <a:rPr lang="en-US" sz="2400" dirty="0">
                 <a:solidFill>
                   <a:srgbClr val="262422"/>
                 </a:solidFill>
@@ -5148,7 +5148,7 @@
               </a:rPr>
               <a:t>Keep: one house brief, one checklist.</a:t>
             </a:r>
-            <a:endParaRPr lang="en-US" sz="1800" dirty="0"/>
+            <a:endParaRPr lang="en-US" sz="2400" dirty="0"/>
           </a:p>
         </p:txBody>
       </p:sp>
@@ -5326,7 +5326,7 @@
               <a:buNone/>
             </a:pPr>
             <a:r>
-              <a:rPr lang="en-US" sz="3600" b="1" dirty="0">
+              <a:rPr lang="en-US" sz="4400" b="1" dirty="0">
                 <a:solidFill>
                   <a:srgbClr val="F1EFEA"/>
                 </a:solidFill>
@@ -5336,7 +5336,7 @@
               </a:rPr>
               <a:t>Not for AI.</a:t>
             </a:r>
-            <a:endParaRPr lang="en-US" sz="3600" dirty="0"/>
+            <a:endParaRPr lang="en-US" sz="4400" dirty="0"/>
           </a:p>
         </p:txBody>
       </p:sp>
@@ -5348,7 +5348,7 @@
         </p:nvSpPr>
         <p:spPr>
           <a:xfrm>
-            <a:off x="548640" y="2377440"/>
+            <a:off x="548640" y="2468880"/>
             <a:ext cx="10515600" cy="3383280"/>
           </a:xfrm>
           <a:prstGeom prst="rect">
@@ -5363,13 +5363,13 @@
           <a:p>
             <a:pPr marL="342900" indent="-342900">
               <a:spcAft>
-                <a:spcPts val="800"/>
+                <a:spcPts val="1200"/>
               </a:spcAft>
               <a:buSzPct val="100000"/>
               <a:buChar char="●"/>
             </a:pPr>
             <a:r>
-              <a:rPr lang="en-US" sz="1800" dirty="0">
+              <a:rPr lang="en-US" sz="2400" dirty="0">
                 <a:solidFill>
                   <a:srgbClr val="F1EFEA"/>
                 </a:solidFill>
@@ -5379,18 +5379,18 @@
               </a:rPr>
               <a:t>Valuations and pricing advice.</a:t>
             </a:r>
-            <a:endParaRPr lang="en-US" sz="1800" dirty="0"/>
+            <a:endParaRPr lang="en-US" sz="2400" dirty="0"/>
           </a:p>
           <a:p>
             <a:pPr marL="342900" indent="-342900">
               <a:spcAft>
-                <a:spcPts val="800"/>
+                <a:spcPts val="1200"/>
               </a:spcAft>
               <a:buSzPct val="100000"/>
               <a:buChar char="●"/>
             </a:pPr>
             <a:r>
-              <a:rPr lang="en-US" sz="1800" dirty="0">
+              <a:rPr lang="en-US" sz="2400" dirty="0">
                 <a:solidFill>
                   <a:srgbClr val="F1EFEA"/>
                 </a:solidFill>
@@ -5400,18 +5400,18 @@
               </a:rPr>
               <a:t>Legal, regulatory or safety statements.</a:t>
             </a:r>
-            <a:endParaRPr lang="en-US" sz="1800" dirty="0"/>
+            <a:endParaRPr lang="en-US" sz="2400" dirty="0"/>
           </a:p>
           <a:p>
             <a:pPr marL="342900" indent="-342900">
               <a:spcAft>
-                <a:spcPts val="800"/>
+                <a:spcPts val="1200"/>
               </a:spcAft>
               <a:buSzPct val="100000"/>
               <a:buChar char="●"/>
             </a:pPr>
             <a:r>
-              <a:rPr lang="en-US" sz="1800" dirty="0">
+              <a:rPr lang="en-US" sz="2400" dirty="0">
                 <a:solidFill>
                   <a:srgbClr val="F1EFEA"/>
                 </a:solidFill>
@@ -5421,18 +5421,18 @@
               </a:rPr>
               <a:t>Language that could steer or discriminate.</a:t>
             </a:r>
-            <a:endParaRPr lang="en-US" sz="1800" dirty="0"/>
+            <a:endParaRPr lang="en-US" sz="2400" dirty="0"/>
           </a:p>
           <a:p>
             <a:pPr marL="342900" indent="-342900">
               <a:spcAft>
-                <a:spcPts val="800"/>
+                <a:spcPts val="1200"/>
               </a:spcAft>
               <a:buSzPct val="100000"/>
               <a:buChar char="●"/>
             </a:pPr>
             <a:r>
-              <a:rPr lang="en-US" sz="1800" dirty="0">
+              <a:rPr lang="en-US" sz="2400" dirty="0">
                 <a:solidFill>
                   <a:srgbClr val="F1EFEA"/>
                 </a:solidFill>
@@ -5442,7 +5442,7 @@
               </a:rPr>
               <a:t>Approving offers, tenancies or transactions.</a:t>
             </a:r>
-            <a:endParaRPr lang="en-US" sz="1800" dirty="0"/>
+            <a:endParaRPr lang="en-US" sz="2400" dirty="0"/>
           </a:p>
         </p:txBody>
       </p:sp>
@@ -5581,7 +5581,7 @@
               <a:buNone/>
             </a:pPr>
             <a:r>
-              <a:rPr lang="en-US" sz="3600" b="1" dirty="0">
+              <a:rPr lang="en-US" sz="4400" b="1" dirty="0">
                 <a:solidFill>
                   <a:srgbClr val="262422"/>
                 </a:solidFill>
@@ -5591,7 +5591,7 @@
               </a:rPr>
               <a:t>Scoped and priced after a conversation.</a:t>
             </a:r>
-            <a:endParaRPr lang="en-US" sz="3600" dirty="0"/>
+            <a:endParaRPr lang="en-US" sz="4400" dirty="0"/>
           </a:p>
         </p:txBody>
       </p:sp>
@@ -5603,7 +5603,7 @@
         </p:nvSpPr>
         <p:spPr>
           <a:xfrm>
-            <a:off x="548640" y="2377440"/>
+            <a:off x="548640" y="2468880"/>
             <a:ext cx="10515600" cy="3383280"/>
           </a:xfrm>
           <a:prstGeom prst="rect">
@@ -5618,13 +5618,13 @@
           <a:p>
             <a:pPr marL="342900" indent="-342900">
               <a:spcAft>
-                <a:spcPts val="800"/>
+                <a:spcPts val="1200"/>
               </a:spcAft>
               <a:buSzPct val="100000"/>
               <a:buChar char="●"/>
             </a:pPr>
             <a:r>
-              <a:rPr lang="en-US" sz="1800" dirty="0">
+              <a:rPr lang="en-US" sz="2400" dirty="0">
                 <a:solidFill>
                   <a:srgbClr val="262422"/>
                 </a:solidFill>
@@ -5634,18 +5634,18 @@
               </a:rPr>
               <a:t>Practice session: one workflow, a small team, reusable workflow cards. Live or remote.</a:t>
             </a:r>
-            <a:endParaRPr lang="en-US" sz="1800" dirty="0"/>
+            <a:endParaRPr lang="en-US" sz="2400" dirty="0"/>
           </a:p>
           <a:p>
             <a:pPr marL="342900" indent="-342900">
               <a:spcAft>
-                <a:spcPts val="800"/>
+                <a:spcPts val="1200"/>
               </a:spcAft>
               <a:buSzPct val="100000"/>
               <a:buChar char="●"/>
             </a:pPr>
             <a:r>
-              <a:rPr lang="en-US" sz="1800" dirty="0">
+              <a:rPr lang="en-US" sz="2400" dirty="0">
                 <a:solidFill>
                   <a:srgbClr val="262422"/>
                 </a:solidFill>
@@ -5655,18 +5655,18 @@
               </a:rPr>
               <a:t>Tailored enablement: a few weeks on two or three of your own workflows, with a review.</a:t>
             </a:r>
-            <a:endParaRPr lang="en-US" sz="1800" dirty="0"/>
+            <a:endParaRPr lang="en-US" sz="2400" dirty="0"/>
           </a:p>
           <a:p>
             <a:pPr marL="342900" indent="-342900">
               <a:spcAft>
-                <a:spcPts val="800"/>
+                <a:spcPts val="1200"/>
               </a:spcAft>
               <a:buSzPct val="100000"/>
               <a:buChar char="●"/>
             </a:pPr>
             <a:r>
-              <a:rPr lang="en-US" sz="1800" dirty="0">
+              <a:rPr lang="en-US" sz="2400" dirty="0">
                 <a:solidFill>
                   <a:srgbClr val="262422"/>
                 </a:solidFill>
@@ -5676,7 +5676,7 @@
               </a:rPr>
               <a:t>Implementation support: several teams or branches, with written rules, owners and simple measures.</a:t>
             </a:r>
-            <a:endParaRPr lang="en-US" sz="1800" dirty="0"/>
+            <a:endParaRPr lang="en-US" sz="2400" dirty="0"/>
           </a:p>
         </p:txBody>
       </p:sp>

--- a/deliverables/fieldwork-launch-kit/04-corporate-sales/fieldwork-sales-deck.pptx
+++ b/deliverables/fieldwork-launch-kit/04-corporate-sales/fieldwork-sales-deck.pptx
@@ -2014,7 +2014,7 @@
     <p:bg>
       <p:bgPr>
         <a:solidFill>
-          <a:srgbClr val="25306E"/>
+          <a:srgbClr val="2340FF"/>
         </a:solidFill>
       </p:bgPr>
     </p:bg>
@@ -2059,7 +2059,7 @@
             <a:r>
               <a:rPr lang="en-US" sz="1000" spc="200" kern="0" dirty="0">
                 <a:solidFill>
-                  <a:srgbClr val="E3A98C"/>
+                  <a:srgbClr val="F3F2ED"/>
                 </a:solidFill>
                 <a:latin typeface="Courier New" pitchFamily="34" charset="0"/>
                 <a:ea typeface="Courier New" pitchFamily="34" charset="-122"/>
@@ -2098,7 +2098,7 @@
             <a:r>
               <a:rPr lang="en-US" sz="8000" b="1" dirty="0">
                 <a:solidFill>
-                  <a:srgbClr val="F1EFEA"/>
+                  <a:srgbClr val="F3F2ED"/>
                 </a:solidFill>
                 <a:latin typeface="Arial" pitchFamily="34" charset="0"/>
                 <a:ea typeface="Arial" pitchFamily="34" charset="-122"/>
@@ -2135,13 +2135,13 @@
               <a:buNone/>
             </a:pPr>
             <a:r>
-              <a:rPr lang="en-US" sz="2200" i="1" dirty="0">
-                <a:solidFill>
-                  <a:srgbClr val="F1EFEA"/>
-                </a:solidFill>
-                <a:latin typeface="Georgia" pitchFamily="34" charset="0"/>
-                <a:ea typeface="Georgia" pitchFamily="34" charset="-122"/>
-                <a:cs typeface="Georgia" pitchFamily="34" charset="-120"/>
+              <a:rPr lang="en-US" sz="2200" dirty="0">
+                <a:solidFill>
+                  <a:srgbClr val="F3F2ED"/>
+                </a:solidFill>
+                <a:latin typeface="Arial" pitchFamily="34" charset="0"/>
+                <a:ea typeface="Arial" pitchFamily="34" charset="-122"/>
+                <a:cs typeface="Arial" pitchFamily="34" charset="-120"/>
               </a:rPr>
               <a:t>Practical AI training for estate and letting teams</a:t>
             </a:r>
@@ -2176,7 +2176,7 @@
             <a:r>
               <a:rPr lang="en-US" sz="1000" dirty="0">
                 <a:solidFill>
-                  <a:srgbClr val="F1EFEA"/>
+                  <a:srgbClr val="F3F2ED"/>
                 </a:solidFill>
                 <a:latin typeface="Courier New" pitchFamily="34" charset="0"/>
                 <a:ea typeface="Courier New" pitchFamily="34" charset="-122"/>
@@ -2215,11 +2215,11 @@
             <a:r>
               <a:rPr lang="en-US" sz="1100" dirty="0">
                 <a:solidFill>
-                  <a:srgbClr val="E3A98C"/>
-                </a:solidFill>
-                <a:latin typeface="Georgia" pitchFamily="34" charset="0"/>
-                <a:ea typeface="Georgia" pitchFamily="34" charset="-122"/>
-                <a:cs typeface="Georgia" pitchFamily="34" charset="-120"/>
+                  <a:srgbClr val="F3F2ED"/>
+                </a:solidFill>
+                <a:latin typeface="Arial" pitchFamily="34" charset="0"/>
+                <a:ea typeface="Arial" pitchFamily="34" charset="-122"/>
+                <a:cs typeface="Arial" pitchFamily="34" charset="-120"/>
               </a:rPr>
               <a:t>Fieldwork</a:t>
             </a:r>
@@ -2241,7 +2241,7 @@
     <p:bg>
       <p:bgPr>
         <a:solidFill>
-          <a:srgbClr val="F1EFEA"/>
+          <a:srgbClr val="F3F2ED"/>
         </a:solidFill>
       </p:bgPr>
     </p:bg>
@@ -2286,7 +2286,7 @@
             <a:r>
               <a:rPr lang="en-US" sz="1000" spc="200" kern="0" dirty="0">
                 <a:solidFill>
-                  <a:srgbClr val="A8512F"/>
+                  <a:srgbClr val="2340FF"/>
                 </a:solidFill>
                 <a:latin typeface="Courier New" pitchFamily="34" charset="0"/>
                 <a:ea typeface="Courier New" pitchFamily="34" charset="-122"/>
@@ -2325,7 +2325,7 @@
             <a:r>
               <a:rPr lang="en-US" sz="4400" b="1" dirty="0">
                 <a:solidFill>
-                  <a:srgbClr val="262422"/>
+                  <a:srgbClr val="121212"/>
                 </a:solidFill>
                 <a:latin typeface="Arial" pitchFamily="34" charset="0"/>
                 <a:ea typeface="Arial" pitchFamily="34" charset="-122"/>
@@ -2368,7 +2368,7 @@
             <a:r>
               <a:rPr lang="en-US" sz="2400" dirty="0">
                 <a:solidFill>
-                  <a:srgbClr val="262422"/>
+                  <a:srgbClr val="121212"/>
                 </a:solidFill>
                 <a:latin typeface="Arial" pitchFamily="34" charset="0"/>
                 <a:ea typeface="Arial" pitchFamily="34" charset="-122"/>
@@ -2389,7 +2389,7 @@
             <a:r>
               <a:rPr lang="en-US" sz="2400" dirty="0">
                 <a:solidFill>
-                  <a:srgbClr val="262422"/>
+                  <a:srgbClr val="121212"/>
                 </a:solidFill>
                 <a:latin typeface="Arial" pitchFamily="34" charset="0"/>
                 <a:ea typeface="Arial" pitchFamily="34" charset="-122"/>
@@ -2410,7 +2410,7 @@
             <a:r>
               <a:rPr lang="en-US" sz="2400" dirty="0">
                 <a:solidFill>
-                  <a:srgbClr val="262422"/>
+                  <a:srgbClr val="121212"/>
                 </a:solidFill>
                 <a:latin typeface="Arial" pitchFamily="34" charset="0"/>
                 <a:ea typeface="Arial" pitchFamily="34" charset="-122"/>
@@ -2431,7 +2431,7 @@
             <a:r>
               <a:rPr lang="en-US" sz="2400" dirty="0">
                 <a:solidFill>
-                  <a:srgbClr val="262422"/>
+                  <a:srgbClr val="121212"/>
                 </a:solidFill>
                 <a:latin typeface="Arial" pitchFamily="34" charset="0"/>
                 <a:ea typeface="Arial" pitchFamily="34" charset="-122"/>
@@ -2470,11 +2470,11 @@
             <a:r>
               <a:rPr lang="en-US" sz="1100" dirty="0">
                 <a:solidFill>
-                  <a:srgbClr val="A8512F"/>
-                </a:solidFill>
-                <a:latin typeface="Georgia" pitchFamily="34" charset="0"/>
-                <a:ea typeface="Georgia" pitchFamily="34" charset="-122"/>
-                <a:cs typeface="Georgia" pitchFamily="34" charset="-120"/>
+                  <a:srgbClr val="2340FF"/>
+                </a:solidFill>
+                <a:latin typeface="Arial" pitchFamily="34" charset="0"/>
+                <a:ea typeface="Arial" pitchFamily="34" charset="-122"/>
+                <a:cs typeface="Arial" pitchFamily="34" charset="-120"/>
               </a:rPr>
               <a:t>Fieldwork</a:t>
             </a:r>
@@ -2496,7 +2496,7 @@
     <p:bg>
       <p:bgPr>
         <a:solidFill>
-          <a:srgbClr val="F1EFEA"/>
+          <a:srgbClr val="F3F2ED"/>
         </a:solidFill>
       </p:bgPr>
     </p:bg>
@@ -2541,7 +2541,7 @@
             <a:r>
               <a:rPr lang="en-US" sz="1000" spc="200" kern="0" dirty="0">
                 <a:solidFill>
-                  <a:srgbClr val="A8512F"/>
+                  <a:srgbClr val="2340FF"/>
                 </a:solidFill>
                 <a:latin typeface="Courier New" pitchFamily="34" charset="0"/>
                 <a:ea typeface="Courier New" pitchFamily="34" charset="-122"/>
@@ -2580,7 +2580,7 @@
             <a:r>
               <a:rPr lang="en-US" sz="4400" b="1" dirty="0">
                 <a:solidFill>
-                  <a:srgbClr val="262422"/>
+                  <a:srgbClr val="121212"/>
                 </a:solidFill>
                 <a:latin typeface="Arial" pitchFamily="34" charset="0"/>
                 <a:ea typeface="Arial" pitchFamily="34" charset="-122"/>
@@ -2623,7 +2623,7 @@
             <a:r>
               <a:rPr lang="en-US" sz="2400" dirty="0">
                 <a:solidFill>
-                  <a:srgbClr val="262422"/>
+                  <a:srgbClr val="121212"/>
                 </a:solidFill>
                 <a:latin typeface="Arial" pitchFamily="34" charset="0"/>
                 <a:ea typeface="Arial" pitchFamily="34" charset="-122"/>
@@ -2644,7 +2644,7 @@
             <a:r>
               <a:rPr lang="en-US" sz="2400" dirty="0">
                 <a:solidFill>
-                  <a:srgbClr val="262422"/>
+                  <a:srgbClr val="121212"/>
                 </a:solidFill>
                 <a:latin typeface="Arial" pitchFamily="34" charset="0"/>
                 <a:ea typeface="Arial" pitchFamily="34" charset="-122"/>
@@ -2665,7 +2665,7 @@
             <a:r>
               <a:rPr lang="en-US" sz="2400" dirty="0">
                 <a:solidFill>
-                  <a:srgbClr val="262422"/>
+                  <a:srgbClr val="121212"/>
                 </a:solidFill>
                 <a:latin typeface="Arial" pitchFamily="34" charset="0"/>
                 <a:ea typeface="Arial" pitchFamily="34" charset="-122"/>
@@ -2686,7 +2686,7 @@
             <a:r>
               <a:rPr lang="en-US" sz="2400" dirty="0">
                 <a:solidFill>
-                  <a:srgbClr val="262422"/>
+                  <a:srgbClr val="121212"/>
                 </a:solidFill>
                 <a:latin typeface="Arial" pitchFamily="34" charset="0"/>
                 <a:ea typeface="Arial" pitchFamily="34" charset="-122"/>
@@ -2707,7 +2707,7 @@
             <a:r>
               <a:rPr lang="en-US" sz="2400" dirty="0">
                 <a:solidFill>
-                  <a:srgbClr val="262422"/>
+                  <a:srgbClr val="121212"/>
                 </a:solidFill>
                 <a:latin typeface="Arial" pitchFamily="34" charset="0"/>
                 <a:ea typeface="Arial" pitchFamily="34" charset="-122"/>
@@ -2746,11 +2746,11 @@
             <a:r>
               <a:rPr lang="en-US" sz="1100" dirty="0">
                 <a:solidFill>
-                  <a:srgbClr val="A8512F"/>
-                </a:solidFill>
-                <a:latin typeface="Georgia" pitchFamily="34" charset="0"/>
-                <a:ea typeface="Georgia" pitchFamily="34" charset="-122"/>
-                <a:cs typeface="Georgia" pitchFamily="34" charset="-120"/>
+                  <a:srgbClr val="2340FF"/>
+                </a:solidFill>
+                <a:latin typeface="Arial" pitchFamily="34" charset="0"/>
+                <a:ea typeface="Arial" pitchFamily="34" charset="-122"/>
+                <a:cs typeface="Arial" pitchFamily="34" charset="-120"/>
               </a:rPr>
               <a:t>Fieldwork</a:t>
             </a:r>
@@ -2772,7 +2772,7 @@
     <p:bg>
       <p:bgPr>
         <a:solidFill>
-          <a:srgbClr val="262422"/>
+          <a:srgbClr val="121212"/>
         </a:solidFill>
       </p:bgPr>
     </p:bg>
@@ -2817,7 +2817,7 @@
             <a:r>
               <a:rPr lang="en-US" sz="1000" spc="200" kern="0" dirty="0">
                 <a:solidFill>
-                  <a:srgbClr val="E3A98C"/>
+                  <a:srgbClr val="7C8FFF"/>
                 </a:solidFill>
                 <a:latin typeface="Courier New" pitchFamily="34" charset="0"/>
                 <a:ea typeface="Courier New" pitchFamily="34" charset="-122"/>
@@ -2856,7 +2856,7 @@
             <a:r>
               <a:rPr lang="en-US" sz="4400" b="1" dirty="0">
                 <a:solidFill>
-                  <a:srgbClr val="F1EFEA"/>
+                  <a:srgbClr val="F3F2ED"/>
                 </a:solidFill>
                 <a:latin typeface="Arial" pitchFamily="34" charset="0"/>
                 <a:ea typeface="Arial" pitchFamily="34" charset="-122"/>
@@ -2899,7 +2899,7 @@
             <a:r>
               <a:rPr lang="en-US" sz="2400" dirty="0">
                 <a:solidFill>
-                  <a:srgbClr val="F1EFEA"/>
+                  <a:srgbClr val="F3F2ED"/>
                 </a:solidFill>
                 <a:latin typeface="Arial" pitchFamily="34" charset="0"/>
                 <a:ea typeface="Arial" pitchFamily="34" charset="-122"/>
@@ -2920,7 +2920,7 @@
             <a:r>
               <a:rPr lang="en-US" sz="2400" dirty="0">
                 <a:solidFill>
-                  <a:srgbClr val="F1EFEA"/>
+                  <a:srgbClr val="F3F2ED"/>
                 </a:solidFill>
                 <a:latin typeface="Arial" pitchFamily="34" charset="0"/>
                 <a:ea typeface="Arial" pitchFamily="34" charset="-122"/>
@@ -2941,7 +2941,7 @@
             <a:r>
               <a:rPr lang="en-US" sz="2400" dirty="0">
                 <a:solidFill>
-                  <a:srgbClr val="F1EFEA"/>
+                  <a:srgbClr val="F3F2ED"/>
                 </a:solidFill>
                 <a:latin typeface="Arial" pitchFamily="34" charset="0"/>
                 <a:ea typeface="Arial" pitchFamily="34" charset="-122"/>
@@ -2962,7 +2962,7 @@
             <a:r>
               <a:rPr lang="en-US" sz="2400" dirty="0">
                 <a:solidFill>
-                  <a:srgbClr val="F1EFEA"/>
+                  <a:srgbClr val="F3F2ED"/>
                 </a:solidFill>
                 <a:latin typeface="Arial" pitchFamily="34" charset="0"/>
                 <a:ea typeface="Arial" pitchFamily="34" charset="-122"/>
@@ -3001,11 +3001,11 @@
             <a:r>
               <a:rPr lang="en-US" sz="1100" dirty="0">
                 <a:solidFill>
-                  <a:srgbClr val="E3A98C"/>
-                </a:solidFill>
-                <a:latin typeface="Georgia" pitchFamily="34" charset="0"/>
-                <a:ea typeface="Georgia" pitchFamily="34" charset="-122"/>
-                <a:cs typeface="Georgia" pitchFamily="34" charset="-120"/>
+                  <a:srgbClr val="7C8FFF"/>
+                </a:solidFill>
+                <a:latin typeface="Arial" pitchFamily="34" charset="0"/>
+                <a:ea typeface="Arial" pitchFamily="34" charset="-122"/>
+                <a:cs typeface="Arial" pitchFamily="34" charset="-120"/>
               </a:rPr>
               <a:t>Fieldwork</a:t>
             </a:r>
@@ -3027,7 +3027,7 @@
     <p:bg>
       <p:bgPr>
         <a:solidFill>
-          <a:srgbClr val="F1EFEA"/>
+          <a:srgbClr val="F3F2ED"/>
         </a:solidFill>
       </p:bgPr>
     </p:bg>
@@ -3072,7 +3072,7 @@
             <a:r>
               <a:rPr lang="en-US" sz="1000" spc="200" kern="0" dirty="0">
                 <a:solidFill>
-                  <a:srgbClr val="A8512F"/>
+                  <a:srgbClr val="2340FF"/>
                 </a:solidFill>
                 <a:latin typeface="Courier New" pitchFamily="34" charset="0"/>
                 <a:ea typeface="Courier New" pitchFamily="34" charset="-122"/>
@@ -3111,7 +3111,7 @@
             <a:r>
               <a:rPr lang="en-US" sz="4400" b="1" dirty="0">
                 <a:solidFill>
-                  <a:srgbClr val="262422"/>
+                  <a:srgbClr val="121212"/>
                 </a:solidFill>
                 <a:latin typeface="Arial" pitchFamily="34" charset="0"/>
                 <a:ea typeface="Arial" pitchFamily="34" charset="-122"/>
@@ -3154,7 +3154,7 @@
             <a:r>
               <a:rPr lang="en-US" sz="2400" dirty="0">
                 <a:solidFill>
-                  <a:srgbClr val="262422"/>
+                  <a:srgbClr val="121212"/>
                 </a:solidFill>
                 <a:latin typeface="Arial" pitchFamily="34" charset="0"/>
                 <a:ea typeface="Arial" pitchFamily="34" charset="-122"/>
@@ -3175,7 +3175,7 @@
             <a:r>
               <a:rPr lang="en-US" sz="2400" dirty="0">
                 <a:solidFill>
-                  <a:srgbClr val="262422"/>
+                  <a:srgbClr val="121212"/>
                 </a:solidFill>
                 <a:latin typeface="Arial" pitchFamily="34" charset="0"/>
                 <a:ea typeface="Arial" pitchFamily="34" charset="-122"/>
@@ -3196,7 +3196,7 @@
             <a:r>
               <a:rPr lang="en-US" sz="2400" dirty="0">
                 <a:solidFill>
-                  <a:srgbClr val="262422"/>
+                  <a:srgbClr val="121212"/>
                 </a:solidFill>
                 <a:latin typeface="Arial" pitchFamily="34" charset="0"/>
                 <a:ea typeface="Arial" pitchFamily="34" charset="-122"/>
@@ -3217,7 +3217,7 @@
             <a:r>
               <a:rPr lang="en-US" sz="2400" dirty="0">
                 <a:solidFill>
-                  <a:srgbClr val="262422"/>
+                  <a:srgbClr val="121212"/>
                 </a:solidFill>
                 <a:latin typeface="Arial" pitchFamily="34" charset="0"/>
                 <a:ea typeface="Arial" pitchFamily="34" charset="-122"/>
@@ -3238,7 +3238,7 @@
             <a:r>
               <a:rPr lang="en-US" sz="2400" dirty="0">
                 <a:solidFill>
-                  <a:srgbClr val="262422"/>
+                  <a:srgbClr val="121212"/>
                 </a:solidFill>
                 <a:latin typeface="Arial" pitchFamily="34" charset="0"/>
                 <a:ea typeface="Arial" pitchFamily="34" charset="-122"/>
@@ -3259,7 +3259,7 @@
             <a:r>
               <a:rPr lang="en-US" sz="2400" dirty="0">
                 <a:solidFill>
-                  <a:srgbClr val="262422"/>
+                  <a:srgbClr val="121212"/>
                 </a:solidFill>
                 <a:latin typeface="Arial" pitchFamily="34" charset="0"/>
                 <a:ea typeface="Arial" pitchFamily="34" charset="-122"/>
@@ -3298,11 +3298,11 @@
             <a:r>
               <a:rPr lang="en-US" sz="1100" dirty="0">
                 <a:solidFill>
-                  <a:srgbClr val="A8512F"/>
-                </a:solidFill>
-                <a:latin typeface="Georgia" pitchFamily="34" charset="0"/>
-                <a:ea typeface="Georgia" pitchFamily="34" charset="-122"/>
-                <a:cs typeface="Georgia" pitchFamily="34" charset="-120"/>
+                  <a:srgbClr val="2340FF"/>
+                </a:solidFill>
+                <a:latin typeface="Arial" pitchFamily="34" charset="0"/>
+                <a:ea typeface="Arial" pitchFamily="34" charset="-122"/>
+                <a:cs typeface="Arial" pitchFamily="34" charset="-120"/>
               </a:rPr>
               <a:t>Fieldwork</a:t>
             </a:r>
@@ -3324,7 +3324,7 @@
     <p:bg>
       <p:bgPr>
         <a:solidFill>
-          <a:srgbClr val="25306E"/>
+          <a:srgbClr val="2340FF"/>
         </a:solidFill>
       </p:bgPr>
     </p:bg>
@@ -3369,7 +3369,7 @@
             <a:r>
               <a:rPr lang="en-US" sz="1000" spc="200" kern="0" dirty="0">
                 <a:solidFill>
-                  <a:srgbClr val="E3A98C"/>
+                  <a:srgbClr val="F3F2ED"/>
                 </a:solidFill>
                 <a:latin typeface="Courier New" pitchFamily="34" charset="0"/>
                 <a:ea typeface="Courier New" pitchFamily="34" charset="-122"/>
@@ -3408,7 +3408,7 @@
             <a:r>
               <a:rPr lang="en-US" sz="4400" b="1" dirty="0">
                 <a:solidFill>
-                  <a:srgbClr val="F1EFEA"/>
+                  <a:srgbClr val="F3F2ED"/>
                 </a:solidFill>
                 <a:latin typeface="Arial" pitchFamily="34" charset="0"/>
                 <a:ea typeface="Arial" pitchFamily="34" charset="-122"/>
@@ -3451,7 +3451,7 @@
             <a:r>
               <a:rPr lang="en-US" sz="2400" dirty="0">
                 <a:solidFill>
-                  <a:srgbClr val="F1EFEA"/>
+                  <a:srgbClr val="F3F2ED"/>
                 </a:solidFill>
                 <a:latin typeface="Arial" pitchFamily="34" charset="0"/>
                 <a:ea typeface="Arial" pitchFamily="34" charset="-122"/>
@@ -3472,7 +3472,7 @@
             <a:r>
               <a:rPr lang="en-US" sz="2400" dirty="0">
                 <a:solidFill>
-                  <a:srgbClr val="F1EFEA"/>
+                  <a:srgbClr val="F3F2ED"/>
                 </a:solidFill>
                 <a:latin typeface="Arial" pitchFamily="34" charset="0"/>
                 <a:ea typeface="Arial" pitchFamily="34" charset="-122"/>
@@ -3493,7 +3493,7 @@
             <a:r>
               <a:rPr lang="en-US" sz="2400" dirty="0">
                 <a:solidFill>
-                  <a:srgbClr val="F1EFEA"/>
+                  <a:srgbClr val="F3F2ED"/>
                 </a:solidFill>
                 <a:latin typeface="Arial" pitchFamily="34" charset="0"/>
                 <a:ea typeface="Arial" pitchFamily="34" charset="-122"/>
@@ -3532,7 +3532,7 @@
             <a:r>
               <a:rPr lang="en-US" sz="1000" dirty="0">
                 <a:solidFill>
-                  <a:srgbClr val="F1EFEA"/>
+                  <a:srgbClr val="F3F2ED"/>
                 </a:solidFill>
                 <a:latin typeface="Courier New" pitchFamily="34" charset="0"/>
                 <a:ea typeface="Courier New" pitchFamily="34" charset="-122"/>
@@ -3571,11 +3571,11 @@
             <a:r>
               <a:rPr lang="en-US" sz="1100" dirty="0">
                 <a:solidFill>
-                  <a:srgbClr val="E3A98C"/>
-                </a:solidFill>
-                <a:latin typeface="Georgia" pitchFamily="34" charset="0"/>
-                <a:ea typeface="Georgia" pitchFamily="34" charset="-122"/>
-                <a:cs typeface="Georgia" pitchFamily="34" charset="-120"/>
+                  <a:srgbClr val="F3F2ED"/>
+                </a:solidFill>
+                <a:latin typeface="Arial" pitchFamily="34" charset="0"/>
+                <a:ea typeface="Arial" pitchFamily="34" charset="-122"/>
+                <a:cs typeface="Arial" pitchFamily="34" charset="-120"/>
               </a:rPr>
               <a:t>Fieldwork</a:t>
             </a:r>
@@ -3597,7 +3597,7 @@
     <p:bg>
       <p:bgPr>
         <a:solidFill>
-          <a:srgbClr val="F1EFEA"/>
+          <a:srgbClr val="F3F2ED"/>
         </a:solidFill>
       </p:bgPr>
     </p:bg>
@@ -3642,7 +3642,7 @@
             <a:r>
               <a:rPr lang="en-US" sz="1000" spc="200" kern="0" dirty="0">
                 <a:solidFill>
-                  <a:srgbClr val="A8512F"/>
+                  <a:srgbClr val="2340FF"/>
                 </a:solidFill>
                 <a:latin typeface="Courier New" pitchFamily="34" charset="0"/>
                 <a:ea typeface="Courier New" pitchFamily="34" charset="-122"/>
@@ -3681,7 +3681,7 @@
             <a:r>
               <a:rPr lang="en-US" sz="4400" b="1" dirty="0">
                 <a:solidFill>
-                  <a:srgbClr val="262422"/>
+                  <a:srgbClr val="121212"/>
                 </a:solidFill>
                 <a:latin typeface="Arial" pitchFamily="34" charset="0"/>
                 <a:ea typeface="Arial" pitchFamily="34" charset="-122"/>
@@ -3724,7 +3724,7 @@
             <a:r>
               <a:rPr lang="en-US" sz="2400" dirty="0">
                 <a:solidFill>
-                  <a:srgbClr val="262422"/>
+                  <a:srgbClr val="121212"/>
                 </a:solidFill>
                 <a:latin typeface="Arial" pitchFamily="34" charset="0"/>
                 <a:ea typeface="Arial" pitchFamily="34" charset="-122"/>
@@ -3745,7 +3745,7 @@
             <a:r>
               <a:rPr lang="en-US" sz="2400" dirty="0">
                 <a:solidFill>
-                  <a:srgbClr val="262422"/>
+                  <a:srgbClr val="121212"/>
                 </a:solidFill>
                 <a:latin typeface="Arial" pitchFamily="34" charset="0"/>
                 <a:ea typeface="Arial" pitchFamily="34" charset="-122"/>
@@ -3766,7 +3766,7 @@
             <a:r>
               <a:rPr lang="en-US" sz="2400" dirty="0">
                 <a:solidFill>
-                  <a:srgbClr val="262422"/>
+                  <a:srgbClr val="121212"/>
                 </a:solidFill>
                 <a:latin typeface="Arial" pitchFamily="34" charset="0"/>
                 <a:ea typeface="Arial" pitchFamily="34" charset="-122"/>
@@ -3787,7 +3787,7 @@
             <a:r>
               <a:rPr lang="en-US" sz="2400" dirty="0">
                 <a:solidFill>
-                  <a:srgbClr val="262422"/>
+                  <a:srgbClr val="121212"/>
                 </a:solidFill>
                 <a:latin typeface="Arial" pitchFamily="34" charset="0"/>
                 <a:ea typeface="Arial" pitchFamily="34" charset="-122"/>
@@ -3826,7 +3826,7 @@
             <a:r>
               <a:rPr lang="en-US" sz="1000" dirty="0">
                 <a:solidFill>
-                  <a:srgbClr val="262422"/>
+                  <a:srgbClr val="121212"/>
                 </a:solidFill>
                 <a:latin typeface="Courier New" pitchFamily="34" charset="0"/>
                 <a:ea typeface="Courier New" pitchFamily="34" charset="-122"/>
@@ -3865,11 +3865,11 @@
             <a:r>
               <a:rPr lang="en-US" sz="1100" dirty="0">
                 <a:solidFill>
-                  <a:srgbClr val="A8512F"/>
-                </a:solidFill>
-                <a:latin typeface="Georgia" pitchFamily="34" charset="0"/>
-                <a:ea typeface="Georgia" pitchFamily="34" charset="-122"/>
-                <a:cs typeface="Georgia" pitchFamily="34" charset="-120"/>
+                  <a:srgbClr val="2340FF"/>
+                </a:solidFill>
+                <a:latin typeface="Arial" pitchFamily="34" charset="0"/>
+                <a:ea typeface="Arial" pitchFamily="34" charset="-122"/>
+                <a:cs typeface="Arial" pitchFamily="34" charset="-120"/>
               </a:rPr>
               <a:t>Fieldwork</a:t>
             </a:r>
@@ -3891,7 +3891,7 @@
     <p:bg>
       <p:bgPr>
         <a:solidFill>
-          <a:srgbClr val="F1EFEA"/>
+          <a:srgbClr val="F3F2ED"/>
         </a:solidFill>
       </p:bgPr>
     </p:bg>
@@ -3936,7 +3936,7 @@
             <a:r>
               <a:rPr lang="en-US" sz="1000" spc="200" kern="0" dirty="0">
                 <a:solidFill>
-                  <a:srgbClr val="A8512F"/>
+                  <a:srgbClr val="2340FF"/>
                 </a:solidFill>
                 <a:latin typeface="Courier New" pitchFamily="34" charset="0"/>
                 <a:ea typeface="Courier New" pitchFamily="34" charset="-122"/>
@@ -3975,7 +3975,7 @@
             <a:r>
               <a:rPr lang="en-US" sz="4400" b="1" dirty="0">
                 <a:solidFill>
-                  <a:srgbClr val="262422"/>
+                  <a:srgbClr val="121212"/>
                 </a:solidFill>
                 <a:latin typeface="Arial" pitchFamily="34" charset="0"/>
                 <a:ea typeface="Arial" pitchFamily="34" charset="-122"/>
@@ -4018,7 +4018,7 @@
             <a:r>
               <a:rPr lang="en-US" sz="2400" dirty="0">
                 <a:solidFill>
-                  <a:srgbClr val="262422"/>
+                  <a:srgbClr val="121212"/>
                 </a:solidFill>
                 <a:latin typeface="Arial" pitchFamily="34" charset="0"/>
                 <a:ea typeface="Arial" pitchFamily="34" charset="-122"/>
@@ -4039,7 +4039,7 @@
             <a:r>
               <a:rPr lang="en-US" sz="2400" dirty="0">
                 <a:solidFill>
-                  <a:srgbClr val="262422"/>
+                  <a:srgbClr val="121212"/>
                 </a:solidFill>
                 <a:latin typeface="Arial" pitchFamily="34" charset="0"/>
                 <a:ea typeface="Arial" pitchFamily="34" charset="-122"/>
@@ -4060,7 +4060,7 @@
             <a:r>
               <a:rPr lang="en-US" sz="2400" dirty="0">
                 <a:solidFill>
-                  <a:srgbClr val="262422"/>
+                  <a:srgbClr val="121212"/>
                 </a:solidFill>
                 <a:latin typeface="Arial" pitchFamily="34" charset="0"/>
                 <a:ea typeface="Arial" pitchFamily="34" charset="-122"/>
@@ -4081,7 +4081,7 @@
             <a:r>
               <a:rPr lang="en-US" sz="2400" dirty="0">
                 <a:solidFill>
-                  <a:srgbClr val="262422"/>
+                  <a:srgbClr val="121212"/>
                 </a:solidFill>
                 <a:latin typeface="Arial" pitchFamily="34" charset="0"/>
                 <a:ea typeface="Arial" pitchFamily="34" charset="-122"/>
@@ -4120,11 +4120,11 @@
             <a:r>
               <a:rPr lang="en-US" sz="1100" dirty="0">
                 <a:solidFill>
-                  <a:srgbClr val="A8512F"/>
-                </a:solidFill>
-                <a:latin typeface="Georgia" pitchFamily="34" charset="0"/>
-                <a:ea typeface="Georgia" pitchFamily="34" charset="-122"/>
-                <a:cs typeface="Georgia" pitchFamily="34" charset="-120"/>
+                  <a:srgbClr val="2340FF"/>
+                </a:solidFill>
+                <a:latin typeface="Arial" pitchFamily="34" charset="0"/>
+                <a:ea typeface="Arial" pitchFamily="34" charset="-122"/>
+                <a:cs typeface="Arial" pitchFamily="34" charset="-120"/>
               </a:rPr>
               <a:t>Fieldwork</a:t>
             </a:r>
@@ -4146,7 +4146,7 @@
     <p:bg>
       <p:bgPr>
         <a:solidFill>
-          <a:srgbClr val="F1EFEA"/>
+          <a:srgbClr val="F3F2ED"/>
         </a:solidFill>
       </p:bgPr>
     </p:bg>
@@ -4191,7 +4191,7 @@
             <a:r>
               <a:rPr lang="en-US" sz="1000" spc="200" kern="0" dirty="0">
                 <a:solidFill>
-                  <a:srgbClr val="A8512F"/>
+                  <a:srgbClr val="2340FF"/>
                 </a:solidFill>
                 <a:latin typeface="Courier New" pitchFamily="34" charset="0"/>
                 <a:ea typeface="Courier New" pitchFamily="34" charset="-122"/>
@@ -4230,7 +4230,7 @@
             <a:r>
               <a:rPr lang="en-US" sz="4400" b="1" dirty="0">
                 <a:solidFill>
-                  <a:srgbClr val="262422"/>
+                  <a:srgbClr val="121212"/>
                 </a:solidFill>
                 <a:latin typeface="Arial" pitchFamily="34" charset="0"/>
                 <a:ea typeface="Arial" pitchFamily="34" charset="-122"/>
@@ -4273,7 +4273,7 @@
             <a:r>
               <a:rPr lang="en-US" sz="2400" dirty="0">
                 <a:solidFill>
-                  <a:srgbClr val="262422"/>
+                  <a:srgbClr val="121212"/>
                 </a:solidFill>
                 <a:latin typeface="Arial" pitchFamily="34" charset="0"/>
                 <a:ea typeface="Arial" pitchFamily="34" charset="-122"/>
@@ -4294,7 +4294,7 @@
             <a:r>
               <a:rPr lang="en-US" sz="2400" dirty="0">
                 <a:solidFill>
-                  <a:srgbClr val="262422"/>
+                  <a:srgbClr val="121212"/>
                 </a:solidFill>
                 <a:latin typeface="Arial" pitchFamily="34" charset="0"/>
                 <a:ea typeface="Arial" pitchFamily="34" charset="-122"/>
@@ -4315,7 +4315,7 @@
             <a:r>
               <a:rPr lang="en-US" sz="2400" dirty="0">
                 <a:solidFill>
-                  <a:srgbClr val="262422"/>
+                  <a:srgbClr val="121212"/>
                 </a:solidFill>
                 <a:latin typeface="Arial" pitchFamily="34" charset="0"/>
                 <a:ea typeface="Arial" pitchFamily="34" charset="-122"/>
@@ -4336,7 +4336,7 @@
             <a:r>
               <a:rPr lang="en-US" sz="2400" dirty="0">
                 <a:solidFill>
-                  <a:srgbClr val="262422"/>
+                  <a:srgbClr val="121212"/>
                 </a:solidFill>
                 <a:latin typeface="Arial" pitchFamily="34" charset="0"/>
                 <a:ea typeface="Arial" pitchFamily="34" charset="-122"/>
@@ -4375,11 +4375,11 @@
             <a:r>
               <a:rPr lang="en-US" sz="1100" dirty="0">
                 <a:solidFill>
-                  <a:srgbClr val="A8512F"/>
-                </a:solidFill>
-                <a:latin typeface="Georgia" pitchFamily="34" charset="0"/>
-                <a:ea typeface="Georgia" pitchFamily="34" charset="-122"/>
-                <a:cs typeface="Georgia" pitchFamily="34" charset="-120"/>
+                  <a:srgbClr val="2340FF"/>
+                </a:solidFill>
+                <a:latin typeface="Arial" pitchFamily="34" charset="0"/>
+                <a:ea typeface="Arial" pitchFamily="34" charset="-122"/>
+                <a:cs typeface="Arial" pitchFamily="34" charset="-120"/>
               </a:rPr>
               <a:t>Fieldwork</a:t>
             </a:r>
@@ -4401,7 +4401,7 @@
     <p:bg>
       <p:bgPr>
         <a:solidFill>
-          <a:srgbClr val="25306E"/>
+          <a:srgbClr val="2340FF"/>
         </a:solidFill>
       </p:bgPr>
     </p:bg>
@@ -4446,7 +4446,7 @@
             <a:r>
               <a:rPr lang="en-US" sz="1000" spc="200" kern="0" dirty="0">
                 <a:solidFill>
-                  <a:srgbClr val="E3A98C"/>
+                  <a:srgbClr val="F3F2ED"/>
                 </a:solidFill>
                 <a:latin typeface="Courier New" pitchFamily="34" charset="0"/>
                 <a:ea typeface="Courier New" pitchFamily="34" charset="-122"/>
@@ -4485,7 +4485,7 @@
             <a:r>
               <a:rPr lang="en-US" sz="4400" b="1" dirty="0">
                 <a:solidFill>
-                  <a:srgbClr val="F1EFEA"/>
+                  <a:srgbClr val="F3F2ED"/>
                 </a:solidFill>
                 <a:latin typeface="Arial" pitchFamily="34" charset="0"/>
                 <a:ea typeface="Arial" pitchFamily="34" charset="-122"/>
@@ -4528,7 +4528,7 @@
             <a:r>
               <a:rPr lang="en-US" sz="2400" dirty="0">
                 <a:solidFill>
-                  <a:srgbClr val="F1EFEA"/>
+                  <a:srgbClr val="F3F2ED"/>
                 </a:solidFill>
                 <a:latin typeface="Arial" pitchFamily="34" charset="0"/>
                 <a:ea typeface="Arial" pitchFamily="34" charset="-122"/>
@@ -4567,11 +4567,11 @@
             <a:r>
               <a:rPr lang="en-US" sz="1100" dirty="0">
                 <a:solidFill>
-                  <a:srgbClr val="E3A98C"/>
-                </a:solidFill>
-                <a:latin typeface="Georgia" pitchFamily="34" charset="0"/>
-                <a:ea typeface="Georgia" pitchFamily="34" charset="-122"/>
-                <a:cs typeface="Georgia" pitchFamily="34" charset="-120"/>
+                  <a:srgbClr val="F3F2ED"/>
+                </a:solidFill>
+                <a:latin typeface="Arial" pitchFamily="34" charset="0"/>
+                <a:ea typeface="Arial" pitchFamily="34" charset="-122"/>
+                <a:cs typeface="Arial" pitchFamily="34" charset="-120"/>
               </a:rPr>
               <a:t>Fieldwork</a:t>
             </a:r>
@@ -4593,7 +4593,7 @@
     <p:bg>
       <p:bgPr>
         <a:solidFill>
-          <a:srgbClr val="F1EFEA"/>
+          <a:srgbClr val="F3F2ED"/>
         </a:solidFill>
       </p:bgPr>
     </p:bg>
@@ -4638,7 +4638,7 @@
             <a:r>
               <a:rPr lang="en-US" sz="1000" spc="200" kern="0" dirty="0">
                 <a:solidFill>
-                  <a:srgbClr val="A8512F"/>
+                  <a:srgbClr val="2340FF"/>
                 </a:solidFill>
                 <a:latin typeface="Courier New" pitchFamily="34" charset="0"/>
                 <a:ea typeface="Courier New" pitchFamily="34" charset="-122"/>
@@ -4677,7 +4677,7 @@
             <a:r>
               <a:rPr lang="en-US" sz="4400" b="1" dirty="0">
                 <a:solidFill>
-                  <a:srgbClr val="262422"/>
+                  <a:srgbClr val="121212"/>
                 </a:solidFill>
                 <a:latin typeface="Arial" pitchFamily="34" charset="0"/>
                 <a:ea typeface="Arial" pitchFamily="34" charset="-122"/>
@@ -4720,7 +4720,7 @@
             <a:r>
               <a:rPr lang="en-US" sz="2400" dirty="0">
                 <a:solidFill>
-                  <a:srgbClr val="262422"/>
+                  <a:srgbClr val="121212"/>
                 </a:solidFill>
                 <a:latin typeface="Arial" pitchFamily="34" charset="0"/>
                 <a:ea typeface="Arial" pitchFamily="34" charset="-122"/>
@@ -4741,7 +4741,7 @@
             <a:r>
               <a:rPr lang="en-US" sz="2400" dirty="0">
                 <a:solidFill>
-                  <a:srgbClr val="262422"/>
+                  <a:srgbClr val="121212"/>
                 </a:solidFill>
                 <a:latin typeface="Arial" pitchFamily="34" charset="0"/>
                 <a:ea typeface="Arial" pitchFamily="34" charset="-122"/>
@@ -4762,7 +4762,7 @@
             <a:r>
               <a:rPr lang="en-US" sz="2400" dirty="0">
                 <a:solidFill>
-                  <a:srgbClr val="262422"/>
+                  <a:srgbClr val="121212"/>
                 </a:solidFill>
                 <a:latin typeface="Arial" pitchFamily="34" charset="0"/>
                 <a:ea typeface="Arial" pitchFamily="34" charset="-122"/>
@@ -4783,7 +4783,7 @@
             <a:r>
               <a:rPr lang="en-US" sz="2400" dirty="0">
                 <a:solidFill>
-                  <a:srgbClr val="262422"/>
+                  <a:srgbClr val="121212"/>
                 </a:solidFill>
                 <a:latin typeface="Arial" pitchFamily="34" charset="0"/>
                 <a:ea typeface="Arial" pitchFamily="34" charset="-122"/>
@@ -4804,7 +4804,7 @@
             <a:r>
               <a:rPr lang="en-US" sz="2400" dirty="0">
                 <a:solidFill>
-                  <a:srgbClr val="262422"/>
+                  <a:srgbClr val="121212"/>
                 </a:solidFill>
                 <a:latin typeface="Arial" pitchFamily="34" charset="0"/>
                 <a:ea typeface="Arial" pitchFamily="34" charset="-122"/>
@@ -4825,7 +4825,7 @@
             <a:r>
               <a:rPr lang="en-US" sz="2400" dirty="0">
                 <a:solidFill>
-                  <a:srgbClr val="262422"/>
+                  <a:srgbClr val="121212"/>
                 </a:solidFill>
                 <a:latin typeface="Arial" pitchFamily="34" charset="0"/>
                 <a:ea typeface="Arial" pitchFamily="34" charset="-122"/>
@@ -4846,7 +4846,7 @@
             <a:r>
               <a:rPr lang="en-US" sz="2400" dirty="0">
                 <a:solidFill>
-                  <a:srgbClr val="262422"/>
+                  <a:srgbClr val="121212"/>
                 </a:solidFill>
                 <a:latin typeface="Arial" pitchFamily="34" charset="0"/>
                 <a:ea typeface="Arial" pitchFamily="34" charset="-122"/>
@@ -4885,7 +4885,7 @@
             <a:r>
               <a:rPr lang="en-US" sz="1000" dirty="0">
                 <a:solidFill>
-                  <a:srgbClr val="262422"/>
+                  <a:srgbClr val="121212"/>
                 </a:solidFill>
                 <a:latin typeface="Courier New" pitchFamily="34" charset="0"/>
                 <a:ea typeface="Courier New" pitchFamily="34" charset="-122"/>
@@ -4924,11 +4924,11 @@
             <a:r>
               <a:rPr lang="en-US" sz="1100" dirty="0">
                 <a:solidFill>
-                  <a:srgbClr val="A8512F"/>
-                </a:solidFill>
-                <a:latin typeface="Georgia" pitchFamily="34" charset="0"/>
-                <a:ea typeface="Georgia" pitchFamily="34" charset="-122"/>
-                <a:cs typeface="Georgia" pitchFamily="34" charset="-120"/>
+                  <a:srgbClr val="2340FF"/>
+                </a:solidFill>
+                <a:latin typeface="Arial" pitchFamily="34" charset="0"/>
+                <a:ea typeface="Arial" pitchFamily="34" charset="-122"/>
+                <a:cs typeface="Arial" pitchFamily="34" charset="-120"/>
               </a:rPr>
               <a:t>Fieldwork</a:t>
             </a:r>
@@ -4950,7 +4950,7 @@
     <p:bg>
       <p:bgPr>
         <a:solidFill>
-          <a:srgbClr val="F1EFEA"/>
+          <a:srgbClr val="F3F2ED"/>
         </a:solidFill>
       </p:bgPr>
     </p:bg>
@@ -4995,7 +4995,7 @@
             <a:r>
               <a:rPr lang="en-US" sz="1000" spc="200" kern="0" dirty="0">
                 <a:solidFill>
-                  <a:srgbClr val="A8512F"/>
+                  <a:srgbClr val="2340FF"/>
                 </a:solidFill>
                 <a:latin typeface="Courier New" pitchFamily="34" charset="0"/>
                 <a:ea typeface="Courier New" pitchFamily="34" charset="-122"/>
@@ -5034,7 +5034,7 @@
             <a:r>
               <a:rPr lang="en-US" sz="4400" b="1" dirty="0">
                 <a:solidFill>
-                  <a:srgbClr val="262422"/>
+                  <a:srgbClr val="121212"/>
                 </a:solidFill>
                 <a:latin typeface="Arial" pitchFamily="34" charset="0"/>
                 <a:ea typeface="Arial" pitchFamily="34" charset="-122"/>
@@ -5077,7 +5077,7 @@
             <a:r>
               <a:rPr lang="en-US" sz="2400" dirty="0">
                 <a:solidFill>
-                  <a:srgbClr val="262422"/>
+                  <a:srgbClr val="121212"/>
                 </a:solidFill>
                 <a:latin typeface="Arial" pitchFamily="34" charset="0"/>
                 <a:ea typeface="Arial" pitchFamily="34" charset="-122"/>
@@ -5098,7 +5098,7 @@
             <a:r>
               <a:rPr lang="en-US" sz="2400" dirty="0">
                 <a:solidFill>
-                  <a:srgbClr val="262422"/>
+                  <a:srgbClr val="121212"/>
                 </a:solidFill>
                 <a:latin typeface="Arial" pitchFamily="34" charset="0"/>
                 <a:ea typeface="Arial" pitchFamily="34" charset="-122"/>
@@ -5119,7 +5119,7 @@
             <a:r>
               <a:rPr lang="en-US" sz="2400" dirty="0">
                 <a:solidFill>
-                  <a:srgbClr val="262422"/>
+                  <a:srgbClr val="121212"/>
                 </a:solidFill>
                 <a:latin typeface="Arial" pitchFamily="34" charset="0"/>
                 <a:ea typeface="Arial" pitchFamily="34" charset="-122"/>
@@ -5140,7 +5140,7 @@
             <a:r>
               <a:rPr lang="en-US" sz="2400" dirty="0">
                 <a:solidFill>
-                  <a:srgbClr val="262422"/>
+                  <a:srgbClr val="121212"/>
                 </a:solidFill>
                 <a:latin typeface="Arial" pitchFamily="34" charset="0"/>
                 <a:ea typeface="Arial" pitchFamily="34" charset="-122"/>
@@ -5179,7 +5179,7 @@
             <a:r>
               <a:rPr lang="en-US" sz="1000" dirty="0">
                 <a:solidFill>
-                  <a:srgbClr val="262422"/>
+                  <a:srgbClr val="121212"/>
                 </a:solidFill>
                 <a:latin typeface="Courier New" pitchFamily="34" charset="0"/>
                 <a:ea typeface="Courier New" pitchFamily="34" charset="-122"/>
@@ -5218,11 +5218,11 @@
             <a:r>
               <a:rPr lang="en-US" sz="1100" dirty="0">
                 <a:solidFill>
-                  <a:srgbClr val="A8512F"/>
-                </a:solidFill>
-                <a:latin typeface="Georgia" pitchFamily="34" charset="0"/>
-                <a:ea typeface="Georgia" pitchFamily="34" charset="-122"/>
-                <a:cs typeface="Georgia" pitchFamily="34" charset="-120"/>
+                  <a:srgbClr val="2340FF"/>
+                </a:solidFill>
+                <a:latin typeface="Arial" pitchFamily="34" charset="0"/>
+                <a:ea typeface="Arial" pitchFamily="34" charset="-122"/>
+                <a:cs typeface="Arial" pitchFamily="34" charset="-120"/>
               </a:rPr>
               <a:t>Fieldwork</a:t>
             </a:r>
@@ -5244,7 +5244,7 @@
     <p:bg>
       <p:bgPr>
         <a:solidFill>
-          <a:srgbClr val="262422"/>
+          <a:srgbClr val="121212"/>
         </a:solidFill>
       </p:bgPr>
     </p:bg>
@@ -5289,7 +5289,7 @@
             <a:r>
               <a:rPr lang="en-US" sz="1000" spc="200" kern="0" dirty="0">
                 <a:solidFill>
-                  <a:srgbClr val="E3A98C"/>
+                  <a:srgbClr val="7C8FFF"/>
                 </a:solidFill>
                 <a:latin typeface="Courier New" pitchFamily="34" charset="0"/>
                 <a:ea typeface="Courier New" pitchFamily="34" charset="-122"/>
@@ -5328,7 +5328,7 @@
             <a:r>
               <a:rPr lang="en-US" sz="4400" b="1" dirty="0">
                 <a:solidFill>
-                  <a:srgbClr val="F1EFEA"/>
+                  <a:srgbClr val="F3F2ED"/>
                 </a:solidFill>
                 <a:latin typeface="Arial" pitchFamily="34" charset="0"/>
                 <a:ea typeface="Arial" pitchFamily="34" charset="-122"/>
@@ -5371,7 +5371,7 @@
             <a:r>
               <a:rPr lang="en-US" sz="2400" dirty="0">
                 <a:solidFill>
-                  <a:srgbClr val="F1EFEA"/>
+                  <a:srgbClr val="F3F2ED"/>
                 </a:solidFill>
                 <a:latin typeface="Arial" pitchFamily="34" charset="0"/>
                 <a:ea typeface="Arial" pitchFamily="34" charset="-122"/>
@@ -5392,7 +5392,7 @@
             <a:r>
               <a:rPr lang="en-US" sz="2400" dirty="0">
                 <a:solidFill>
-                  <a:srgbClr val="F1EFEA"/>
+                  <a:srgbClr val="F3F2ED"/>
                 </a:solidFill>
                 <a:latin typeface="Arial" pitchFamily="34" charset="0"/>
                 <a:ea typeface="Arial" pitchFamily="34" charset="-122"/>
@@ -5413,7 +5413,7 @@
             <a:r>
               <a:rPr lang="en-US" sz="2400" dirty="0">
                 <a:solidFill>
-                  <a:srgbClr val="F1EFEA"/>
+                  <a:srgbClr val="F3F2ED"/>
                 </a:solidFill>
                 <a:latin typeface="Arial" pitchFamily="34" charset="0"/>
                 <a:ea typeface="Arial" pitchFamily="34" charset="-122"/>
@@ -5434,7 +5434,7 @@
             <a:r>
               <a:rPr lang="en-US" sz="2400" dirty="0">
                 <a:solidFill>
-                  <a:srgbClr val="F1EFEA"/>
+                  <a:srgbClr val="F3F2ED"/>
                 </a:solidFill>
                 <a:latin typeface="Arial" pitchFamily="34" charset="0"/>
                 <a:ea typeface="Arial" pitchFamily="34" charset="-122"/>
@@ -5473,11 +5473,11 @@
             <a:r>
               <a:rPr lang="en-US" sz="1100" dirty="0">
                 <a:solidFill>
-                  <a:srgbClr val="E3A98C"/>
-                </a:solidFill>
-                <a:latin typeface="Georgia" pitchFamily="34" charset="0"/>
-                <a:ea typeface="Georgia" pitchFamily="34" charset="-122"/>
-                <a:cs typeface="Georgia" pitchFamily="34" charset="-120"/>
+                  <a:srgbClr val="7C8FFF"/>
+                </a:solidFill>
+                <a:latin typeface="Arial" pitchFamily="34" charset="0"/>
+                <a:ea typeface="Arial" pitchFamily="34" charset="-122"/>
+                <a:cs typeface="Arial" pitchFamily="34" charset="-120"/>
               </a:rPr>
               <a:t>Fieldwork</a:t>
             </a:r>
@@ -5499,7 +5499,7 @@
     <p:bg>
       <p:bgPr>
         <a:solidFill>
-          <a:srgbClr val="F1EFEA"/>
+          <a:srgbClr val="F3F2ED"/>
         </a:solidFill>
       </p:bgPr>
     </p:bg>
@@ -5544,7 +5544,7 @@
             <a:r>
               <a:rPr lang="en-US" sz="1000" spc="200" kern="0" dirty="0">
                 <a:solidFill>
-                  <a:srgbClr val="A8512F"/>
+                  <a:srgbClr val="2340FF"/>
                 </a:solidFill>
                 <a:latin typeface="Courier New" pitchFamily="34" charset="0"/>
                 <a:ea typeface="Courier New" pitchFamily="34" charset="-122"/>
@@ -5583,7 +5583,7 @@
             <a:r>
               <a:rPr lang="en-US" sz="4400" b="1" dirty="0">
                 <a:solidFill>
-                  <a:srgbClr val="262422"/>
+                  <a:srgbClr val="121212"/>
                 </a:solidFill>
                 <a:latin typeface="Arial" pitchFamily="34" charset="0"/>
                 <a:ea typeface="Arial" pitchFamily="34" charset="-122"/>
@@ -5626,7 +5626,7 @@
             <a:r>
               <a:rPr lang="en-US" sz="2400" dirty="0">
                 <a:solidFill>
-                  <a:srgbClr val="262422"/>
+                  <a:srgbClr val="121212"/>
                 </a:solidFill>
                 <a:latin typeface="Arial" pitchFamily="34" charset="0"/>
                 <a:ea typeface="Arial" pitchFamily="34" charset="-122"/>
@@ -5647,7 +5647,7 @@
             <a:r>
               <a:rPr lang="en-US" sz="2400" dirty="0">
                 <a:solidFill>
-                  <a:srgbClr val="262422"/>
+                  <a:srgbClr val="121212"/>
                 </a:solidFill>
                 <a:latin typeface="Arial" pitchFamily="34" charset="0"/>
                 <a:ea typeface="Arial" pitchFamily="34" charset="-122"/>
@@ -5668,7 +5668,7 @@
             <a:r>
               <a:rPr lang="en-US" sz="2400" dirty="0">
                 <a:solidFill>
-                  <a:srgbClr val="262422"/>
+                  <a:srgbClr val="121212"/>
                 </a:solidFill>
                 <a:latin typeface="Arial" pitchFamily="34" charset="0"/>
                 <a:ea typeface="Arial" pitchFamily="34" charset="-122"/>
@@ -5707,7 +5707,7 @@
             <a:r>
               <a:rPr lang="en-US" sz="1000" dirty="0">
                 <a:solidFill>
-                  <a:srgbClr val="262422"/>
+                  <a:srgbClr val="121212"/>
                 </a:solidFill>
                 <a:latin typeface="Courier New" pitchFamily="34" charset="0"/>
                 <a:ea typeface="Courier New" pitchFamily="34" charset="-122"/>
@@ -5746,11 +5746,11 @@
             <a:r>
               <a:rPr lang="en-US" sz="1100" dirty="0">
                 <a:solidFill>
-                  <a:srgbClr val="A8512F"/>
-                </a:solidFill>
-                <a:latin typeface="Georgia" pitchFamily="34" charset="0"/>
-                <a:ea typeface="Georgia" pitchFamily="34" charset="-122"/>
-                <a:cs typeface="Georgia" pitchFamily="34" charset="-120"/>
+                  <a:srgbClr val="2340FF"/>
+                </a:solidFill>
+                <a:latin typeface="Arial" pitchFamily="34" charset="0"/>
+                <a:ea typeface="Arial" pitchFamily="34" charset="-122"/>
+                <a:cs typeface="Arial" pitchFamily="34" charset="-120"/>
               </a:rPr>
               <a:t>Fieldwork</a:t>
             </a:r>
